--- a/Презентация.pptx
+++ b/Презентация.pptx
@@ -5,44 +5,18 @@
     <p:sldMasterId id="2147483648" r:id="rId1"/>
   </p:sldMasterIdLst>
   <p:notesMasterIdLst>
-    <p:notesMasterId r:id="rId4"/>
+    <p:notesMasterId r:id="rId8"/>
   </p:notesMasterIdLst>
   <p:sldIdLst>
-    <p:sldId id="256" r:id="rId3"/>
-    <p:sldId id="257" r:id="rId5"/>
-    <p:sldId id="258" r:id="rId6"/>
-    <p:sldId id="259" r:id="rId7"/>
-    <p:sldId id="260" r:id="rId8"/>
-    <p:sldId id="261" r:id="rId9"/>
+    <p:sldId id="256" r:id="rId2"/>
+    <p:sldId id="257" r:id="rId3"/>
+    <p:sldId id="258" r:id="rId4"/>
+    <p:sldId id="259" r:id="rId5"/>
+    <p:sldId id="260" r:id="rId6"/>
+    <p:sldId id="261" r:id="rId7"/>
   </p:sldIdLst>
   <p:sldSz cx="12192000" cy="6858000"/>
   <p:notesSz cx="6858000" cy="9144000"/>
-  <p:embeddedFontLst>
-    <p:embeddedFont>
-      <p:font typeface="Calibri" panose="020F0502020204030204"/>
-      <p:regular r:id="rId13"/>
-      <p:bold r:id="rId14"/>
-      <p:italic r:id="rId15"/>
-      <p:boldItalic r:id="rId16"/>
-    </p:embeddedFont>
-    <p:embeddedFont>
-      <p:font typeface="Poppins" panose="00000500000000000000"/>
-      <p:regular r:id="rId17"/>
-      <p:italic r:id="rId18"/>
-    </p:embeddedFont>
-    <p:embeddedFont>
-      <p:font typeface="Lato" panose="020F0502020204030203"/>
-      <p:regular r:id="rId19"/>
-      <p:bold r:id="rId20"/>
-      <p:italic r:id="rId21"/>
-      <p:boldItalic r:id="rId22"/>
-    </p:embeddedFont>
-    <p:embeddedFont>
-      <p:font typeface="Poppins SemiBold" panose="00000500000000000000"/>
-      <p:regular r:id="rId23"/>
-      <p:italic r:id="rId24"/>
-    </p:embeddedFont>
-  </p:embeddedFontLst>
   <p:defaultTextStyle>
     <a:defPPr marR="0" lvl="0" algn="l" rtl="0">
       <a:lnSpc>
@@ -301,7 +275,7 @@
     </p:bg>
     <p:spTree>
       <p:nvGrpSpPr>
-        <p:cNvPr id="2" name="Shape 2"/>
+        <p:cNvPr id="1" name="Shape 2"/>
         <p:cNvGrpSpPr/>
         <p:nvPr/>
       </p:nvGrpSpPr>
@@ -316,7 +290,9 @@
       <p:sp>
         <p:nvSpPr>
           <p:cNvPr id="3" name="Google Shape;3;n"/>
-          <p:cNvSpPr/>
+          <p:cNvSpPr>
+            <a:spLocks noGrp="1" noRot="1" noChangeAspect="1"/>
+          </p:cNvSpPr>
           <p:nvPr>
             <p:ph type="sldImg" idx="2"/>
           </p:nvPr>
@@ -365,7 +341,9 @@
       <p:sp>
         <p:nvSpPr>
           <p:cNvPr id="4" name="Google Shape;4;n"/>
-          <p:cNvSpPr txBox="1"/>
+          <p:cNvSpPr txBox="1">
+            <a:spLocks noGrp="1"/>
+          </p:cNvSpPr>
           <p:nvPr>
             <p:ph type="body" idx="1"/>
           </p:nvPr>
@@ -488,7 +466,9 @@
               <a:defRPr sz="1100"/>
             </a:lvl9pPr>
           </a:lstStyle>
-          <a:p/>
+          <a:p>
+            <a:endParaRPr/>
+          </a:p>
         </p:txBody>
       </p:sp>
     </p:spTree>
@@ -727,11 +707,11 @@
 </file>
 
 <file path=ppt/notesSlides/notesSlide1.xml><?xml version="1.0" encoding="utf-8"?>
-<p:notes xmlns:a="http://schemas.openxmlformats.org/drawingml/2006/main" xmlns:r="http://schemas.openxmlformats.org/officeDocument/2006/relationships" xmlns:p="http://schemas.openxmlformats.org/presentationml/2006/main" showMasterPhAnim="0" showMasterSp="0">
+<p:notes xmlns:a="http://schemas.openxmlformats.org/drawingml/2006/main" xmlns:r="http://schemas.openxmlformats.org/officeDocument/2006/relationships" xmlns:p="http://schemas.openxmlformats.org/presentationml/2006/main" showMasterSp="0" showMasterPhAnim="0">
   <p:cSld>
     <p:spTree>
       <p:nvGrpSpPr>
-        <p:cNvPr id="80" name="Shape 80"/>
+        <p:cNvPr id="1" name="Shape 80"/>
         <p:cNvGrpSpPr/>
         <p:nvPr/>
       </p:nvGrpSpPr>
@@ -746,7 +726,9 @@
       <p:sp>
         <p:nvSpPr>
           <p:cNvPr id="81" name="Google Shape;81;p1:notes"/>
-          <p:cNvSpPr txBox="1"/>
+          <p:cNvSpPr txBox="1">
+            <a:spLocks noGrp="1"/>
+          </p:cNvSpPr>
           <p:nvPr>
             <p:ph type="body" idx="1"/>
           </p:nvPr>
@@ -775,21 +757,24 @@
               </a:spcAft>
               <a:buNone/>
             </a:pPr>
+            <a:endParaRPr/>
           </a:p>
         </p:txBody>
       </p:sp>
       <p:sp>
         <p:nvSpPr>
           <p:cNvPr id="82" name="Google Shape;82;p1:notes"/>
-          <p:cNvSpPr/>
+          <p:cNvSpPr>
+            <a:spLocks noGrp="1" noRot="1" noChangeAspect="1"/>
+          </p:cNvSpPr>
           <p:nvPr>
             <p:ph type="sldImg" idx="2"/>
           </p:nvPr>
         </p:nvSpPr>
         <p:spPr>
           <a:xfrm>
-            <a:off x="1143225" y="685800"/>
-            <a:ext cx="4572225" cy="3429000"/>
+            <a:off x="381000" y="685800"/>
+            <a:ext cx="6096000" cy="3429000"/>
           </a:xfrm>
           <a:custGeom>
             <a:avLst/>
@@ -826,11 +811,11 @@
 </file>
 
 <file path=ppt/notesSlides/notesSlide2.xml><?xml version="1.0" encoding="utf-8"?>
-<p:notes xmlns:a="http://schemas.openxmlformats.org/drawingml/2006/main" xmlns:r="http://schemas.openxmlformats.org/officeDocument/2006/relationships" xmlns:p="http://schemas.openxmlformats.org/presentationml/2006/main" showMasterPhAnim="0" showMasterSp="0">
+<p:notes xmlns:a="http://schemas.openxmlformats.org/drawingml/2006/main" xmlns:r="http://schemas.openxmlformats.org/officeDocument/2006/relationships" xmlns:p="http://schemas.openxmlformats.org/presentationml/2006/main" showMasterSp="0" showMasterPhAnim="0">
   <p:cSld>
     <p:spTree>
       <p:nvGrpSpPr>
-        <p:cNvPr id="92" name="Shape 92"/>
+        <p:cNvPr id="1" name="Shape 92"/>
         <p:cNvGrpSpPr/>
         <p:nvPr/>
       </p:nvGrpSpPr>
@@ -845,7 +830,9 @@
       <p:sp>
         <p:nvSpPr>
           <p:cNvPr id="93" name="Google Shape;93;p2:notes"/>
-          <p:cNvSpPr txBox="1"/>
+          <p:cNvSpPr txBox="1">
+            <a:spLocks noGrp="1"/>
+          </p:cNvSpPr>
           <p:nvPr>
             <p:ph type="body" idx="1"/>
           </p:nvPr>
@@ -874,13 +861,16 @@
               </a:spcAft>
               <a:buNone/>
             </a:pPr>
+            <a:endParaRPr/>
           </a:p>
         </p:txBody>
       </p:sp>
       <p:sp>
         <p:nvSpPr>
           <p:cNvPr id="94" name="Google Shape;94;p2:notes"/>
-          <p:cNvSpPr/>
+          <p:cNvSpPr>
+            <a:spLocks noGrp="1" noRot="1" noChangeAspect="1"/>
+          </p:cNvSpPr>
           <p:nvPr>
             <p:ph type="sldImg" idx="2"/>
           </p:nvPr>
@@ -925,11 +915,11 @@
 </file>
 
 <file path=ppt/notesSlides/notesSlide3.xml><?xml version="1.0" encoding="utf-8"?>
-<p:notes xmlns:a="http://schemas.openxmlformats.org/drawingml/2006/main" xmlns:r="http://schemas.openxmlformats.org/officeDocument/2006/relationships" xmlns:p="http://schemas.openxmlformats.org/presentationml/2006/main" showMasterPhAnim="0" showMasterSp="0">
+<p:notes xmlns:a="http://schemas.openxmlformats.org/drawingml/2006/main" xmlns:r="http://schemas.openxmlformats.org/officeDocument/2006/relationships" xmlns:p="http://schemas.openxmlformats.org/presentationml/2006/main" showMasterSp="0" showMasterPhAnim="0">
   <p:cSld>
     <p:spTree>
       <p:nvGrpSpPr>
-        <p:cNvPr id="111" name="Shape 111"/>
+        <p:cNvPr id="1" name="Shape 111"/>
         <p:cNvGrpSpPr/>
         <p:nvPr/>
       </p:nvGrpSpPr>
@@ -944,7 +934,9 @@
       <p:sp>
         <p:nvSpPr>
           <p:cNvPr id="112" name="Google Shape;112;p3:notes"/>
-          <p:cNvSpPr txBox="1"/>
+          <p:cNvSpPr txBox="1">
+            <a:spLocks noGrp="1"/>
+          </p:cNvSpPr>
           <p:nvPr>
             <p:ph type="body" idx="1"/>
           </p:nvPr>
@@ -973,13 +965,16 @@
               </a:spcAft>
               <a:buNone/>
             </a:pPr>
+            <a:endParaRPr/>
           </a:p>
         </p:txBody>
       </p:sp>
       <p:sp>
         <p:nvSpPr>
           <p:cNvPr id="113" name="Google Shape;113;p3:notes"/>
-          <p:cNvSpPr/>
+          <p:cNvSpPr>
+            <a:spLocks noGrp="1" noRot="1" noChangeAspect="1"/>
+          </p:cNvSpPr>
           <p:nvPr>
             <p:ph type="sldImg" idx="2"/>
           </p:nvPr>
@@ -1024,11 +1019,11 @@
 </file>
 
 <file path=ppt/notesSlides/notesSlide4.xml><?xml version="1.0" encoding="utf-8"?>
-<p:notes xmlns:a="http://schemas.openxmlformats.org/drawingml/2006/main" xmlns:r="http://schemas.openxmlformats.org/officeDocument/2006/relationships" xmlns:p="http://schemas.openxmlformats.org/presentationml/2006/main" showMasterPhAnim="0" showMasterSp="0">
+<p:notes xmlns:a="http://schemas.openxmlformats.org/drawingml/2006/main" xmlns:r="http://schemas.openxmlformats.org/officeDocument/2006/relationships" xmlns:p="http://schemas.openxmlformats.org/presentationml/2006/main" showMasterSp="0" showMasterPhAnim="0">
   <p:cSld>
     <p:spTree>
       <p:nvGrpSpPr>
-        <p:cNvPr id="126" name="Shape 126"/>
+        <p:cNvPr id="1" name="Shape 126"/>
         <p:cNvGrpSpPr/>
         <p:nvPr/>
       </p:nvGrpSpPr>
@@ -1043,7 +1038,9 @@
       <p:sp>
         <p:nvSpPr>
           <p:cNvPr id="127" name="Google Shape;127;p4:notes"/>
-          <p:cNvSpPr txBox="1"/>
+          <p:cNvSpPr txBox="1">
+            <a:spLocks noGrp="1"/>
+          </p:cNvSpPr>
           <p:nvPr>
             <p:ph type="body" idx="1"/>
           </p:nvPr>
@@ -1072,13 +1069,16 @@
               </a:spcAft>
               <a:buNone/>
             </a:pPr>
+            <a:endParaRPr/>
           </a:p>
         </p:txBody>
       </p:sp>
       <p:sp>
         <p:nvSpPr>
           <p:cNvPr id="128" name="Google Shape;128;p4:notes"/>
-          <p:cNvSpPr/>
+          <p:cNvSpPr>
+            <a:spLocks noGrp="1" noRot="1" noChangeAspect="1"/>
+          </p:cNvSpPr>
           <p:nvPr>
             <p:ph type="sldImg" idx="2"/>
           </p:nvPr>
@@ -1123,11 +1123,11 @@
 </file>
 
 <file path=ppt/notesSlides/notesSlide5.xml><?xml version="1.0" encoding="utf-8"?>
-<p:notes xmlns:a="http://schemas.openxmlformats.org/drawingml/2006/main" xmlns:r="http://schemas.openxmlformats.org/officeDocument/2006/relationships" xmlns:p="http://schemas.openxmlformats.org/presentationml/2006/main" showMasterPhAnim="0" showMasterSp="0">
+<p:notes xmlns:a="http://schemas.openxmlformats.org/drawingml/2006/main" xmlns:r="http://schemas.openxmlformats.org/officeDocument/2006/relationships" xmlns:p="http://schemas.openxmlformats.org/presentationml/2006/main" showMasterSp="0" showMasterPhAnim="0">
   <p:cSld>
     <p:spTree>
       <p:nvGrpSpPr>
-        <p:cNvPr id="144" name="Shape 144"/>
+        <p:cNvPr id="1" name="Shape 144"/>
         <p:cNvGrpSpPr/>
         <p:nvPr/>
       </p:nvGrpSpPr>
@@ -1142,7 +1142,9 @@
       <p:sp>
         <p:nvSpPr>
           <p:cNvPr id="145" name="Google Shape;145;p5:notes"/>
-          <p:cNvSpPr txBox="1"/>
+          <p:cNvSpPr txBox="1">
+            <a:spLocks noGrp="1"/>
+          </p:cNvSpPr>
           <p:nvPr>
             <p:ph type="body" idx="1"/>
           </p:nvPr>
@@ -1171,13 +1173,16 @@
               </a:spcAft>
               <a:buNone/>
             </a:pPr>
+            <a:endParaRPr/>
           </a:p>
         </p:txBody>
       </p:sp>
       <p:sp>
         <p:nvSpPr>
           <p:cNvPr id="146" name="Google Shape;146;p5:notes"/>
-          <p:cNvSpPr/>
+          <p:cNvSpPr>
+            <a:spLocks noGrp="1" noRot="1" noChangeAspect="1"/>
+          </p:cNvSpPr>
           <p:nvPr>
             <p:ph type="sldImg" idx="2"/>
           </p:nvPr>
@@ -1222,11 +1227,11 @@
 </file>
 
 <file path=ppt/notesSlides/notesSlide6.xml><?xml version="1.0" encoding="utf-8"?>
-<p:notes xmlns:a="http://schemas.openxmlformats.org/drawingml/2006/main" xmlns:r="http://schemas.openxmlformats.org/officeDocument/2006/relationships" xmlns:p="http://schemas.openxmlformats.org/presentationml/2006/main" showMasterPhAnim="0" showMasterSp="0">
+<p:notes xmlns:a="http://schemas.openxmlformats.org/drawingml/2006/main" xmlns:r="http://schemas.openxmlformats.org/officeDocument/2006/relationships" xmlns:p="http://schemas.openxmlformats.org/presentationml/2006/main" showMasterSp="0" showMasterPhAnim="0">
   <p:cSld>
     <p:spTree>
       <p:nvGrpSpPr>
-        <p:cNvPr id="161" name="Shape 161"/>
+        <p:cNvPr id="1" name="Shape 161"/>
         <p:cNvGrpSpPr/>
         <p:nvPr/>
       </p:nvGrpSpPr>
@@ -1241,7 +1246,9 @@
       <p:sp>
         <p:nvSpPr>
           <p:cNvPr id="162" name="Google Shape;162;p6:notes"/>
-          <p:cNvSpPr txBox="1"/>
+          <p:cNvSpPr txBox="1">
+            <a:spLocks noGrp="1"/>
+          </p:cNvSpPr>
           <p:nvPr>
             <p:ph type="body" idx="1"/>
           </p:nvPr>
@@ -1270,13 +1277,16 @@
               </a:spcAft>
               <a:buNone/>
             </a:pPr>
+            <a:endParaRPr/>
           </a:p>
         </p:txBody>
       </p:sp>
       <p:sp>
         <p:nvSpPr>
           <p:cNvPr id="163" name="Google Shape;163;p6:notes"/>
-          <p:cNvSpPr/>
+          <p:cNvSpPr>
+            <a:spLocks noGrp="1" noRot="1" noChangeAspect="1"/>
+          </p:cNvSpPr>
           <p:nvPr>
             <p:ph type="sldImg" idx="2"/>
           </p:nvPr>
@@ -1321,11 +1331,11 @@
 </file>
 
 <file path=ppt/slideLayouts/slideLayout1.xml><?xml version="1.0" encoding="utf-8"?>
-<p:sldLayout xmlns:a="http://schemas.openxmlformats.org/drawingml/2006/main" xmlns:r="http://schemas.openxmlformats.org/officeDocument/2006/relationships" xmlns:p="http://schemas.openxmlformats.org/presentationml/2006/main" type="blank" matchingName="Blank">
+<p:sldLayout xmlns:a="http://schemas.openxmlformats.org/drawingml/2006/main" xmlns:r="http://schemas.openxmlformats.org/officeDocument/2006/relationships" xmlns:p="http://schemas.openxmlformats.org/presentationml/2006/main" matchingName="Blank" type="blank">
   <p:cSld name="BLANK">
     <p:spTree>
       <p:nvGrpSpPr>
-        <p:cNvPr id="11" name="Shape 11"/>
+        <p:cNvPr id="1" name="Shape 11"/>
         <p:cNvGrpSpPr/>
         <p:nvPr/>
       </p:nvGrpSpPr>
@@ -1340,7 +1350,9 @@
       <p:sp>
         <p:nvSpPr>
           <p:cNvPr id="12" name="Google Shape;12;p2"/>
-          <p:cNvSpPr txBox="1"/>
+          <p:cNvSpPr txBox="1">
+            <a:spLocks noGrp="1"/>
+          </p:cNvSpPr>
           <p:nvPr>
             <p:ph type="dt" idx="10"/>
           </p:nvPr>
@@ -1463,13 +1475,17 @@
               <a:defRPr/>
             </a:lvl9pPr>
           </a:lstStyle>
-          <a:p/>
+          <a:p>
+            <a:endParaRPr/>
+          </a:p>
         </p:txBody>
       </p:sp>
       <p:sp>
         <p:nvSpPr>
           <p:cNvPr id="13" name="Google Shape;13;p2"/>
-          <p:cNvSpPr txBox="1"/>
+          <p:cNvSpPr txBox="1">
+            <a:spLocks noGrp="1"/>
+          </p:cNvSpPr>
           <p:nvPr>
             <p:ph type="ftr" idx="11"/>
           </p:nvPr>
@@ -1592,13 +1608,17 @@
               <a:defRPr/>
             </a:lvl9pPr>
           </a:lstStyle>
-          <a:p/>
+          <a:p>
+            <a:endParaRPr/>
+          </a:p>
         </p:txBody>
       </p:sp>
       <p:sp>
         <p:nvSpPr>
           <p:cNvPr id="14" name="Google Shape;14;p2"/>
-          <p:cNvSpPr txBox="1"/>
+          <p:cNvSpPr txBox="1">
+            <a:spLocks noGrp="1"/>
+          </p:cNvSpPr>
           <p:nvPr>
             <p:ph type="sldNum" idx="12"/>
           </p:nvPr>
@@ -1697,6 +1717,7 @@
             </a:pPr>
             <a:fld id="{00000000-1234-1234-1234-123412341234}" type="slidenum">
               <a:rPr lang="en-US"/>
+              <a:t>‹#›</a:t>
             </a:fld>
             <a:endParaRPr lang="en-US"/>
           </a:p>
@@ -1711,11 +1732,11 @@
 </file>
 
 <file path=ppt/slideLayouts/slideLayout10.xml><?xml version="1.0" encoding="utf-8"?>
-<p:sldLayout xmlns:a="http://schemas.openxmlformats.org/drawingml/2006/main" xmlns:r="http://schemas.openxmlformats.org/officeDocument/2006/relationships" xmlns:p="http://schemas.openxmlformats.org/presentationml/2006/main" type="vertTx" matchingName="Title and Vertical Text">
+<p:sldLayout xmlns:a="http://schemas.openxmlformats.org/drawingml/2006/main" xmlns:r="http://schemas.openxmlformats.org/officeDocument/2006/relationships" xmlns:p="http://schemas.openxmlformats.org/presentationml/2006/main" matchingName="Title and Vertical Text" type="vertTx">
   <p:cSld name="VERTICAL_TEXT">
     <p:spTree>
       <p:nvGrpSpPr>
-        <p:cNvPr id="68" name="Shape 68"/>
+        <p:cNvPr id="1" name="Shape 68"/>
         <p:cNvGrpSpPr/>
         <p:nvPr/>
       </p:nvGrpSpPr>
@@ -1730,7 +1751,9 @@
       <p:sp>
         <p:nvSpPr>
           <p:cNvPr id="69" name="Google Shape;69;p11"/>
-          <p:cNvSpPr txBox="1"/>
+          <p:cNvSpPr txBox="1">
+            <a:spLocks noGrp="1"/>
+          </p:cNvSpPr>
           <p:nvPr>
             <p:ph type="title"/>
           </p:nvPr>
@@ -1856,13 +1879,17 @@
               <a:defRPr/>
             </a:lvl9pPr>
           </a:lstStyle>
-          <a:p/>
+          <a:p>
+            <a:endParaRPr/>
+          </a:p>
         </p:txBody>
       </p:sp>
       <p:sp>
         <p:nvSpPr>
           <p:cNvPr id="70" name="Google Shape;70;p11"/>
-          <p:cNvSpPr txBox="1"/>
+          <p:cNvSpPr txBox="1">
+            <a:spLocks noGrp="1"/>
+          </p:cNvSpPr>
           <p:nvPr>
             <p:ph type="body" idx="1"/>
           </p:nvPr>
@@ -2012,13 +2039,17 @@
               <a:defRPr/>
             </a:lvl9pPr>
           </a:lstStyle>
-          <a:p/>
+          <a:p>
+            <a:endParaRPr/>
+          </a:p>
         </p:txBody>
       </p:sp>
       <p:sp>
         <p:nvSpPr>
           <p:cNvPr id="71" name="Google Shape;71;p11"/>
-          <p:cNvSpPr txBox="1"/>
+          <p:cNvSpPr txBox="1">
+            <a:spLocks noGrp="1"/>
+          </p:cNvSpPr>
           <p:nvPr>
             <p:ph type="dt" idx="10"/>
           </p:nvPr>
@@ -2141,13 +2172,17 @@
               <a:defRPr/>
             </a:lvl9pPr>
           </a:lstStyle>
-          <a:p/>
+          <a:p>
+            <a:endParaRPr/>
+          </a:p>
         </p:txBody>
       </p:sp>
       <p:sp>
         <p:nvSpPr>
           <p:cNvPr id="72" name="Google Shape;72;p11"/>
-          <p:cNvSpPr txBox="1"/>
+          <p:cNvSpPr txBox="1">
+            <a:spLocks noGrp="1"/>
+          </p:cNvSpPr>
           <p:nvPr>
             <p:ph type="ftr" idx="11"/>
           </p:nvPr>
@@ -2270,13 +2305,17 @@
               <a:defRPr/>
             </a:lvl9pPr>
           </a:lstStyle>
-          <a:p/>
+          <a:p>
+            <a:endParaRPr/>
+          </a:p>
         </p:txBody>
       </p:sp>
       <p:sp>
         <p:nvSpPr>
           <p:cNvPr id="73" name="Google Shape;73;p11"/>
-          <p:cNvSpPr txBox="1"/>
+          <p:cNvSpPr txBox="1">
+            <a:spLocks noGrp="1"/>
+          </p:cNvSpPr>
           <p:nvPr>
             <p:ph type="sldNum" idx="12"/>
           </p:nvPr>
@@ -2375,6 +2414,7 @@
             </a:pPr>
             <a:fld id="{00000000-1234-1234-1234-123412341234}" type="slidenum">
               <a:rPr lang="en-US"/>
+              <a:t>‹#›</a:t>
             </a:fld>
             <a:endParaRPr lang="en-US"/>
           </a:p>
@@ -2389,11 +2429,11 @@
 </file>
 
 <file path=ppt/slideLayouts/slideLayout11.xml><?xml version="1.0" encoding="utf-8"?>
-<p:sldLayout xmlns:a="http://schemas.openxmlformats.org/drawingml/2006/main" xmlns:r="http://schemas.openxmlformats.org/officeDocument/2006/relationships" xmlns:p="http://schemas.openxmlformats.org/presentationml/2006/main" type="vertTitleAndTx" matchingName="Vertical Title and Text">
+<p:sldLayout xmlns:a="http://schemas.openxmlformats.org/drawingml/2006/main" xmlns:r="http://schemas.openxmlformats.org/officeDocument/2006/relationships" xmlns:p="http://schemas.openxmlformats.org/presentationml/2006/main" matchingName="Vertical Title and Text" type="vertTitleAndTx">
   <p:cSld name="VERTICAL_TITLE_AND_VERTICAL_TEXT">
     <p:spTree>
       <p:nvGrpSpPr>
-        <p:cNvPr id="74" name="Shape 74"/>
+        <p:cNvPr id="1" name="Shape 74"/>
         <p:cNvGrpSpPr/>
         <p:nvPr/>
       </p:nvGrpSpPr>
@@ -2408,7 +2448,9 @@
       <p:sp>
         <p:nvSpPr>
           <p:cNvPr id="75" name="Google Shape;75;p12"/>
-          <p:cNvSpPr txBox="1"/>
+          <p:cNvSpPr txBox="1">
+            <a:spLocks noGrp="1"/>
+          </p:cNvSpPr>
           <p:nvPr>
             <p:ph type="title"/>
           </p:nvPr>
@@ -2534,13 +2576,17 @@
               <a:defRPr/>
             </a:lvl9pPr>
           </a:lstStyle>
-          <a:p/>
+          <a:p>
+            <a:endParaRPr/>
+          </a:p>
         </p:txBody>
       </p:sp>
       <p:sp>
         <p:nvSpPr>
           <p:cNvPr id="76" name="Google Shape;76;p12"/>
-          <p:cNvSpPr txBox="1"/>
+          <p:cNvSpPr txBox="1">
+            <a:spLocks noGrp="1"/>
+          </p:cNvSpPr>
           <p:nvPr>
             <p:ph type="body" idx="1"/>
           </p:nvPr>
@@ -2690,13 +2736,17 @@
               <a:defRPr/>
             </a:lvl9pPr>
           </a:lstStyle>
-          <a:p/>
+          <a:p>
+            <a:endParaRPr/>
+          </a:p>
         </p:txBody>
       </p:sp>
       <p:sp>
         <p:nvSpPr>
           <p:cNvPr id="77" name="Google Shape;77;p12"/>
-          <p:cNvSpPr txBox="1"/>
+          <p:cNvSpPr txBox="1">
+            <a:spLocks noGrp="1"/>
+          </p:cNvSpPr>
           <p:nvPr>
             <p:ph type="dt" idx="10"/>
           </p:nvPr>
@@ -2819,13 +2869,17 @@
               <a:defRPr/>
             </a:lvl9pPr>
           </a:lstStyle>
-          <a:p/>
+          <a:p>
+            <a:endParaRPr/>
+          </a:p>
         </p:txBody>
       </p:sp>
       <p:sp>
         <p:nvSpPr>
           <p:cNvPr id="78" name="Google Shape;78;p12"/>
-          <p:cNvSpPr txBox="1"/>
+          <p:cNvSpPr txBox="1">
+            <a:spLocks noGrp="1"/>
+          </p:cNvSpPr>
           <p:nvPr>
             <p:ph type="ftr" idx="11"/>
           </p:nvPr>
@@ -2948,13 +3002,17 @@
               <a:defRPr/>
             </a:lvl9pPr>
           </a:lstStyle>
-          <a:p/>
+          <a:p>
+            <a:endParaRPr/>
+          </a:p>
         </p:txBody>
       </p:sp>
       <p:sp>
         <p:nvSpPr>
           <p:cNvPr id="79" name="Google Shape;79;p12"/>
-          <p:cNvSpPr txBox="1"/>
+          <p:cNvSpPr txBox="1">
+            <a:spLocks noGrp="1"/>
+          </p:cNvSpPr>
           <p:nvPr>
             <p:ph type="sldNum" idx="12"/>
           </p:nvPr>
@@ -3053,6 +3111,7 @@
             </a:pPr>
             <a:fld id="{00000000-1234-1234-1234-123412341234}" type="slidenum">
               <a:rPr lang="en-US"/>
+              <a:t>‹#›</a:t>
             </a:fld>
             <a:endParaRPr lang="en-US"/>
           </a:p>
@@ -3067,11 +3126,11 @@
 </file>
 
 <file path=ppt/slideLayouts/slideLayout2.xml><?xml version="1.0" encoding="utf-8"?>
-<p:sldLayout xmlns:a="http://schemas.openxmlformats.org/drawingml/2006/main" xmlns:r="http://schemas.openxmlformats.org/officeDocument/2006/relationships" xmlns:p="http://schemas.openxmlformats.org/presentationml/2006/main" type="title" matchingName="Title Slide">
+<p:sldLayout xmlns:a="http://schemas.openxmlformats.org/drawingml/2006/main" xmlns:r="http://schemas.openxmlformats.org/officeDocument/2006/relationships" xmlns:p="http://schemas.openxmlformats.org/presentationml/2006/main" matchingName="Title Slide" type="title">
   <p:cSld name="TITLE">
     <p:spTree>
       <p:nvGrpSpPr>
-        <p:cNvPr id="15" name="Shape 15"/>
+        <p:cNvPr id="1" name="Shape 15"/>
         <p:cNvGrpSpPr/>
         <p:nvPr/>
       </p:nvGrpSpPr>
@@ -3086,7 +3145,9 @@
       <p:sp>
         <p:nvSpPr>
           <p:cNvPr id="16" name="Google Shape;16;p3"/>
-          <p:cNvSpPr txBox="1"/>
+          <p:cNvSpPr txBox="1">
+            <a:spLocks noGrp="1"/>
+          </p:cNvSpPr>
           <p:nvPr>
             <p:ph type="ctrTitle"/>
           </p:nvPr>
@@ -3212,13 +3273,17 @@
               <a:defRPr/>
             </a:lvl9pPr>
           </a:lstStyle>
-          <a:p/>
+          <a:p>
+            <a:endParaRPr/>
+          </a:p>
         </p:txBody>
       </p:sp>
       <p:sp>
         <p:nvSpPr>
           <p:cNvPr id="17" name="Google Shape;17;p3"/>
-          <p:cNvSpPr txBox="1"/>
+          <p:cNvSpPr txBox="1">
+            <a:spLocks noGrp="1"/>
+          </p:cNvSpPr>
           <p:nvPr>
             <p:ph type="subTitle" idx="1"/>
           </p:nvPr>
@@ -3404,13 +3469,17 @@
               </a:defRPr>
             </a:lvl9pPr>
           </a:lstStyle>
-          <a:p/>
+          <a:p>
+            <a:endParaRPr/>
+          </a:p>
         </p:txBody>
       </p:sp>
       <p:sp>
         <p:nvSpPr>
           <p:cNvPr id="18" name="Google Shape;18;p3"/>
-          <p:cNvSpPr txBox="1"/>
+          <p:cNvSpPr txBox="1">
+            <a:spLocks noGrp="1"/>
+          </p:cNvSpPr>
           <p:nvPr>
             <p:ph type="dt" idx="10"/>
           </p:nvPr>
@@ -3533,13 +3602,17 @@
               <a:defRPr/>
             </a:lvl9pPr>
           </a:lstStyle>
-          <a:p/>
+          <a:p>
+            <a:endParaRPr/>
+          </a:p>
         </p:txBody>
       </p:sp>
       <p:sp>
         <p:nvSpPr>
           <p:cNvPr id="19" name="Google Shape;19;p3"/>
-          <p:cNvSpPr txBox="1"/>
+          <p:cNvSpPr txBox="1">
+            <a:spLocks noGrp="1"/>
+          </p:cNvSpPr>
           <p:nvPr>
             <p:ph type="ftr" idx="11"/>
           </p:nvPr>
@@ -3662,13 +3735,17 @@
               <a:defRPr/>
             </a:lvl9pPr>
           </a:lstStyle>
-          <a:p/>
+          <a:p>
+            <a:endParaRPr/>
+          </a:p>
         </p:txBody>
       </p:sp>
       <p:sp>
         <p:nvSpPr>
           <p:cNvPr id="20" name="Google Shape;20;p3"/>
-          <p:cNvSpPr txBox="1"/>
+          <p:cNvSpPr txBox="1">
+            <a:spLocks noGrp="1"/>
+          </p:cNvSpPr>
           <p:nvPr>
             <p:ph type="sldNum" idx="12"/>
           </p:nvPr>
@@ -3767,6 +3844,7 @@
             </a:pPr>
             <a:fld id="{00000000-1234-1234-1234-123412341234}" type="slidenum">
               <a:rPr lang="en-US"/>
+              <a:t>‹#›</a:t>
             </a:fld>
             <a:endParaRPr lang="en-US"/>
           </a:p>
@@ -3781,11 +3859,11 @@
 </file>
 
 <file path=ppt/slideLayouts/slideLayout3.xml><?xml version="1.0" encoding="utf-8"?>
-<p:sldLayout xmlns:a="http://schemas.openxmlformats.org/drawingml/2006/main" xmlns:r="http://schemas.openxmlformats.org/officeDocument/2006/relationships" xmlns:p="http://schemas.openxmlformats.org/presentationml/2006/main" type="obj" matchingName="Title and Content">
+<p:sldLayout xmlns:a="http://schemas.openxmlformats.org/drawingml/2006/main" xmlns:r="http://schemas.openxmlformats.org/officeDocument/2006/relationships" xmlns:p="http://schemas.openxmlformats.org/presentationml/2006/main" matchingName="Title and Content" type="obj">
   <p:cSld name="OBJECT">
     <p:spTree>
       <p:nvGrpSpPr>
-        <p:cNvPr id="21" name="Shape 21"/>
+        <p:cNvPr id="1" name="Shape 21"/>
         <p:cNvGrpSpPr/>
         <p:nvPr/>
       </p:nvGrpSpPr>
@@ -3800,7 +3878,9 @@
       <p:sp>
         <p:nvSpPr>
           <p:cNvPr id="22" name="Google Shape;22;p4"/>
-          <p:cNvSpPr txBox="1"/>
+          <p:cNvSpPr txBox="1">
+            <a:spLocks noGrp="1"/>
+          </p:cNvSpPr>
           <p:nvPr>
             <p:ph type="title"/>
           </p:nvPr>
@@ -3926,13 +4006,17 @@
               <a:defRPr/>
             </a:lvl9pPr>
           </a:lstStyle>
-          <a:p/>
+          <a:p>
+            <a:endParaRPr/>
+          </a:p>
         </p:txBody>
       </p:sp>
       <p:sp>
         <p:nvSpPr>
           <p:cNvPr id="23" name="Google Shape;23;p4"/>
-          <p:cNvSpPr txBox="1"/>
+          <p:cNvSpPr txBox="1">
+            <a:spLocks noGrp="1"/>
+          </p:cNvSpPr>
           <p:nvPr>
             <p:ph type="body" idx="1"/>
           </p:nvPr>
@@ -4082,13 +4166,17 @@
               <a:defRPr/>
             </a:lvl9pPr>
           </a:lstStyle>
-          <a:p/>
+          <a:p>
+            <a:endParaRPr/>
+          </a:p>
         </p:txBody>
       </p:sp>
       <p:sp>
         <p:nvSpPr>
           <p:cNvPr id="24" name="Google Shape;24;p4"/>
-          <p:cNvSpPr txBox="1"/>
+          <p:cNvSpPr txBox="1">
+            <a:spLocks noGrp="1"/>
+          </p:cNvSpPr>
           <p:nvPr>
             <p:ph type="dt" idx="10"/>
           </p:nvPr>
@@ -4211,13 +4299,17 @@
               <a:defRPr/>
             </a:lvl9pPr>
           </a:lstStyle>
-          <a:p/>
+          <a:p>
+            <a:endParaRPr/>
+          </a:p>
         </p:txBody>
       </p:sp>
       <p:sp>
         <p:nvSpPr>
           <p:cNvPr id="25" name="Google Shape;25;p4"/>
-          <p:cNvSpPr txBox="1"/>
+          <p:cNvSpPr txBox="1">
+            <a:spLocks noGrp="1"/>
+          </p:cNvSpPr>
           <p:nvPr>
             <p:ph type="ftr" idx="11"/>
           </p:nvPr>
@@ -4340,13 +4432,17 @@
               <a:defRPr/>
             </a:lvl9pPr>
           </a:lstStyle>
-          <a:p/>
+          <a:p>
+            <a:endParaRPr/>
+          </a:p>
         </p:txBody>
       </p:sp>
       <p:sp>
         <p:nvSpPr>
           <p:cNvPr id="26" name="Google Shape;26;p4"/>
-          <p:cNvSpPr txBox="1"/>
+          <p:cNvSpPr txBox="1">
+            <a:spLocks noGrp="1"/>
+          </p:cNvSpPr>
           <p:nvPr>
             <p:ph type="sldNum" idx="12"/>
           </p:nvPr>
@@ -4445,6 +4541,7 @@
             </a:pPr>
             <a:fld id="{00000000-1234-1234-1234-123412341234}" type="slidenum">
               <a:rPr lang="en-US"/>
+              <a:t>‹#›</a:t>
             </a:fld>
             <a:endParaRPr lang="en-US"/>
           </a:p>
@@ -4459,11 +4556,11 @@
 </file>
 
 <file path=ppt/slideLayouts/slideLayout4.xml><?xml version="1.0" encoding="utf-8"?>
-<p:sldLayout xmlns:a="http://schemas.openxmlformats.org/drawingml/2006/main" xmlns:r="http://schemas.openxmlformats.org/officeDocument/2006/relationships" xmlns:p="http://schemas.openxmlformats.org/presentationml/2006/main" type="secHead" matchingName="Section Header">
+<p:sldLayout xmlns:a="http://schemas.openxmlformats.org/drawingml/2006/main" xmlns:r="http://schemas.openxmlformats.org/officeDocument/2006/relationships" xmlns:p="http://schemas.openxmlformats.org/presentationml/2006/main" matchingName="Section Header" type="secHead">
   <p:cSld name="SECTION_HEADER">
     <p:spTree>
       <p:nvGrpSpPr>
-        <p:cNvPr id="27" name="Shape 27"/>
+        <p:cNvPr id="1" name="Shape 27"/>
         <p:cNvGrpSpPr/>
         <p:nvPr/>
       </p:nvGrpSpPr>
@@ -4478,7 +4575,9 @@
       <p:sp>
         <p:nvSpPr>
           <p:cNvPr id="28" name="Google Shape;28;p5"/>
-          <p:cNvSpPr txBox="1"/>
+          <p:cNvSpPr txBox="1">
+            <a:spLocks noGrp="1"/>
+          </p:cNvSpPr>
           <p:nvPr>
             <p:ph type="title"/>
           </p:nvPr>
@@ -4605,13 +4704,17 @@
               <a:defRPr/>
             </a:lvl9pPr>
           </a:lstStyle>
-          <a:p/>
+          <a:p>
+            <a:endParaRPr/>
+          </a:p>
         </p:txBody>
       </p:sp>
       <p:sp>
         <p:nvSpPr>
           <p:cNvPr id="29" name="Google Shape;29;p5"/>
-          <p:cNvSpPr txBox="1"/>
+          <p:cNvSpPr txBox="1">
+            <a:spLocks noGrp="1"/>
+          </p:cNvSpPr>
           <p:nvPr>
             <p:ph type="body" idx="1"/>
           </p:nvPr>
@@ -4797,13 +4900,17 @@
               </a:defRPr>
             </a:lvl9pPr>
           </a:lstStyle>
-          <a:p/>
+          <a:p>
+            <a:endParaRPr/>
+          </a:p>
         </p:txBody>
       </p:sp>
       <p:sp>
         <p:nvSpPr>
           <p:cNvPr id="30" name="Google Shape;30;p5"/>
-          <p:cNvSpPr txBox="1"/>
+          <p:cNvSpPr txBox="1">
+            <a:spLocks noGrp="1"/>
+          </p:cNvSpPr>
           <p:nvPr>
             <p:ph type="dt" idx="10"/>
           </p:nvPr>
@@ -4926,13 +5033,17 @@
               <a:defRPr/>
             </a:lvl9pPr>
           </a:lstStyle>
-          <a:p/>
+          <a:p>
+            <a:endParaRPr/>
+          </a:p>
         </p:txBody>
       </p:sp>
       <p:sp>
         <p:nvSpPr>
           <p:cNvPr id="31" name="Google Shape;31;p5"/>
-          <p:cNvSpPr txBox="1"/>
+          <p:cNvSpPr txBox="1">
+            <a:spLocks noGrp="1"/>
+          </p:cNvSpPr>
           <p:nvPr>
             <p:ph type="ftr" idx="11"/>
           </p:nvPr>
@@ -5055,13 +5166,17 @@
               <a:defRPr/>
             </a:lvl9pPr>
           </a:lstStyle>
-          <a:p/>
+          <a:p>
+            <a:endParaRPr/>
+          </a:p>
         </p:txBody>
       </p:sp>
       <p:sp>
         <p:nvSpPr>
           <p:cNvPr id="32" name="Google Shape;32;p5"/>
-          <p:cNvSpPr txBox="1"/>
+          <p:cNvSpPr txBox="1">
+            <a:spLocks noGrp="1"/>
+          </p:cNvSpPr>
           <p:nvPr>
             <p:ph type="sldNum" idx="12"/>
           </p:nvPr>
@@ -5160,6 +5275,7 @@
             </a:pPr>
             <a:fld id="{00000000-1234-1234-1234-123412341234}" type="slidenum">
               <a:rPr lang="en-US"/>
+              <a:t>‹#›</a:t>
             </a:fld>
             <a:endParaRPr lang="en-US"/>
           </a:p>
@@ -5174,11 +5290,11 @@
 </file>
 
 <file path=ppt/slideLayouts/slideLayout5.xml><?xml version="1.0" encoding="utf-8"?>
-<p:sldLayout xmlns:a="http://schemas.openxmlformats.org/drawingml/2006/main" xmlns:r="http://schemas.openxmlformats.org/officeDocument/2006/relationships" xmlns:p="http://schemas.openxmlformats.org/presentationml/2006/main" type="twoObj" matchingName="Two Content">
+<p:sldLayout xmlns:a="http://schemas.openxmlformats.org/drawingml/2006/main" xmlns:r="http://schemas.openxmlformats.org/officeDocument/2006/relationships" xmlns:p="http://schemas.openxmlformats.org/presentationml/2006/main" matchingName="Two Content" type="twoObj">
   <p:cSld name="TWO_OBJECTS">
     <p:spTree>
       <p:nvGrpSpPr>
-        <p:cNvPr id="33" name="Shape 33"/>
+        <p:cNvPr id="1" name="Shape 33"/>
         <p:cNvGrpSpPr/>
         <p:nvPr/>
       </p:nvGrpSpPr>
@@ -5193,7 +5309,9 @@
       <p:sp>
         <p:nvSpPr>
           <p:cNvPr id="34" name="Google Shape;34;p6"/>
-          <p:cNvSpPr txBox="1"/>
+          <p:cNvSpPr txBox="1">
+            <a:spLocks noGrp="1"/>
+          </p:cNvSpPr>
           <p:nvPr>
             <p:ph type="title"/>
           </p:nvPr>
@@ -5319,13 +5437,17 @@
               <a:defRPr/>
             </a:lvl9pPr>
           </a:lstStyle>
-          <a:p/>
+          <a:p>
+            <a:endParaRPr/>
+          </a:p>
         </p:txBody>
       </p:sp>
       <p:sp>
         <p:nvSpPr>
           <p:cNvPr id="35" name="Google Shape;35;p6"/>
-          <p:cNvSpPr txBox="1"/>
+          <p:cNvSpPr txBox="1">
+            <a:spLocks noGrp="1"/>
+          </p:cNvSpPr>
           <p:nvPr>
             <p:ph type="body" idx="1"/>
           </p:nvPr>
@@ -5475,13 +5597,17 @@
               <a:defRPr sz="1800"/>
             </a:lvl9pPr>
           </a:lstStyle>
-          <a:p/>
+          <a:p>
+            <a:endParaRPr/>
+          </a:p>
         </p:txBody>
       </p:sp>
       <p:sp>
         <p:nvSpPr>
           <p:cNvPr id="36" name="Google Shape;36;p6"/>
-          <p:cNvSpPr txBox="1"/>
+          <p:cNvSpPr txBox="1">
+            <a:spLocks noGrp="1"/>
+          </p:cNvSpPr>
           <p:nvPr>
             <p:ph type="body" idx="2"/>
           </p:nvPr>
@@ -5631,13 +5757,17 @@
               <a:defRPr sz="1800"/>
             </a:lvl9pPr>
           </a:lstStyle>
-          <a:p/>
+          <a:p>
+            <a:endParaRPr/>
+          </a:p>
         </p:txBody>
       </p:sp>
       <p:sp>
         <p:nvSpPr>
           <p:cNvPr id="37" name="Google Shape;37;p6"/>
-          <p:cNvSpPr txBox="1"/>
+          <p:cNvSpPr txBox="1">
+            <a:spLocks noGrp="1"/>
+          </p:cNvSpPr>
           <p:nvPr>
             <p:ph type="dt" idx="10"/>
           </p:nvPr>
@@ -5760,13 +5890,17 @@
               <a:defRPr/>
             </a:lvl9pPr>
           </a:lstStyle>
-          <a:p/>
+          <a:p>
+            <a:endParaRPr/>
+          </a:p>
         </p:txBody>
       </p:sp>
       <p:sp>
         <p:nvSpPr>
           <p:cNvPr id="38" name="Google Shape;38;p6"/>
-          <p:cNvSpPr txBox="1"/>
+          <p:cNvSpPr txBox="1">
+            <a:spLocks noGrp="1"/>
+          </p:cNvSpPr>
           <p:nvPr>
             <p:ph type="ftr" idx="11"/>
           </p:nvPr>
@@ -5889,13 +6023,17 @@
               <a:defRPr/>
             </a:lvl9pPr>
           </a:lstStyle>
-          <a:p/>
+          <a:p>
+            <a:endParaRPr/>
+          </a:p>
         </p:txBody>
       </p:sp>
       <p:sp>
         <p:nvSpPr>
           <p:cNvPr id="39" name="Google Shape;39;p6"/>
-          <p:cNvSpPr txBox="1"/>
+          <p:cNvSpPr txBox="1">
+            <a:spLocks noGrp="1"/>
+          </p:cNvSpPr>
           <p:nvPr>
             <p:ph type="sldNum" idx="12"/>
           </p:nvPr>
@@ -5994,6 +6132,7 @@
             </a:pPr>
             <a:fld id="{00000000-1234-1234-1234-123412341234}" type="slidenum">
               <a:rPr lang="en-US"/>
+              <a:t>‹#›</a:t>
             </a:fld>
             <a:endParaRPr lang="en-US"/>
           </a:p>
@@ -6008,11 +6147,11 @@
 </file>
 
 <file path=ppt/slideLayouts/slideLayout6.xml><?xml version="1.0" encoding="utf-8"?>
-<p:sldLayout xmlns:a="http://schemas.openxmlformats.org/drawingml/2006/main" xmlns:r="http://schemas.openxmlformats.org/officeDocument/2006/relationships" xmlns:p="http://schemas.openxmlformats.org/presentationml/2006/main" type="twoTxTwoObj" matchingName="Comparison">
+<p:sldLayout xmlns:a="http://schemas.openxmlformats.org/drawingml/2006/main" xmlns:r="http://schemas.openxmlformats.org/officeDocument/2006/relationships" xmlns:p="http://schemas.openxmlformats.org/presentationml/2006/main" matchingName="Comparison" type="twoTxTwoObj">
   <p:cSld name="TWO_OBJECTS_WITH_TEXT">
     <p:spTree>
       <p:nvGrpSpPr>
-        <p:cNvPr id="40" name="Shape 40"/>
+        <p:cNvPr id="1" name="Shape 40"/>
         <p:cNvGrpSpPr/>
         <p:nvPr/>
       </p:nvGrpSpPr>
@@ -6027,7 +6166,9 @@
       <p:sp>
         <p:nvSpPr>
           <p:cNvPr id="41" name="Google Shape;41;p7"/>
-          <p:cNvSpPr txBox="1"/>
+          <p:cNvSpPr txBox="1">
+            <a:spLocks noGrp="1"/>
+          </p:cNvSpPr>
           <p:nvPr>
             <p:ph type="title"/>
           </p:nvPr>
@@ -6154,13 +6295,17 @@
               <a:defRPr/>
             </a:lvl9pPr>
           </a:lstStyle>
-          <a:p/>
+          <a:p>
+            <a:endParaRPr/>
+          </a:p>
         </p:txBody>
       </p:sp>
       <p:sp>
         <p:nvSpPr>
           <p:cNvPr id="42" name="Google Shape;42;p7"/>
-          <p:cNvSpPr txBox="1"/>
+          <p:cNvSpPr txBox="1">
+            <a:spLocks noGrp="1"/>
+          </p:cNvSpPr>
           <p:nvPr>
             <p:ph type="body" idx="1"/>
           </p:nvPr>
@@ -6310,13 +6455,17 @@
               <a:defRPr sz="1600" b="1"/>
             </a:lvl9pPr>
           </a:lstStyle>
-          <a:p/>
+          <a:p>
+            <a:endParaRPr/>
+          </a:p>
         </p:txBody>
       </p:sp>
       <p:sp>
         <p:nvSpPr>
           <p:cNvPr id="43" name="Google Shape;43;p7"/>
-          <p:cNvSpPr txBox="1"/>
+          <p:cNvSpPr txBox="1">
+            <a:spLocks noGrp="1"/>
+          </p:cNvSpPr>
           <p:nvPr>
             <p:ph type="body" idx="2"/>
           </p:nvPr>
@@ -6466,13 +6615,17 @@
               <a:defRPr sz="1600"/>
             </a:lvl9pPr>
           </a:lstStyle>
-          <a:p/>
+          <a:p>
+            <a:endParaRPr/>
+          </a:p>
         </p:txBody>
       </p:sp>
       <p:sp>
         <p:nvSpPr>
           <p:cNvPr id="44" name="Google Shape;44;p7"/>
-          <p:cNvSpPr txBox="1"/>
+          <p:cNvSpPr txBox="1">
+            <a:spLocks noGrp="1"/>
+          </p:cNvSpPr>
           <p:nvPr>
             <p:ph type="body" idx="3"/>
           </p:nvPr>
@@ -6622,13 +6775,17 @@
               <a:defRPr sz="1600" b="1"/>
             </a:lvl9pPr>
           </a:lstStyle>
-          <a:p/>
+          <a:p>
+            <a:endParaRPr/>
+          </a:p>
         </p:txBody>
       </p:sp>
       <p:sp>
         <p:nvSpPr>
           <p:cNvPr id="45" name="Google Shape;45;p7"/>
-          <p:cNvSpPr txBox="1"/>
+          <p:cNvSpPr txBox="1">
+            <a:spLocks noGrp="1"/>
+          </p:cNvSpPr>
           <p:nvPr>
             <p:ph type="body" idx="4"/>
           </p:nvPr>
@@ -6778,13 +6935,17 @@
               <a:defRPr sz="1600"/>
             </a:lvl9pPr>
           </a:lstStyle>
-          <a:p/>
+          <a:p>
+            <a:endParaRPr/>
+          </a:p>
         </p:txBody>
       </p:sp>
       <p:sp>
         <p:nvSpPr>
           <p:cNvPr id="46" name="Google Shape;46;p7"/>
-          <p:cNvSpPr txBox="1"/>
+          <p:cNvSpPr txBox="1">
+            <a:spLocks noGrp="1"/>
+          </p:cNvSpPr>
           <p:nvPr>
             <p:ph type="dt" idx="10"/>
           </p:nvPr>
@@ -6907,13 +7068,17 @@
               <a:defRPr/>
             </a:lvl9pPr>
           </a:lstStyle>
-          <a:p/>
+          <a:p>
+            <a:endParaRPr/>
+          </a:p>
         </p:txBody>
       </p:sp>
       <p:sp>
         <p:nvSpPr>
           <p:cNvPr id="47" name="Google Shape;47;p7"/>
-          <p:cNvSpPr txBox="1"/>
+          <p:cNvSpPr txBox="1">
+            <a:spLocks noGrp="1"/>
+          </p:cNvSpPr>
           <p:nvPr>
             <p:ph type="ftr" idx="11"/>
           </p:nvPr>
@@ -7036,13 +7201,17 @@
               <a:defRPr/>
             </a:lvl9pPr>
           </a:lstStyle>
-          <a:p/>
+          <a:p>
+            <a:endParaRPr/>
+          </a:p>
         </p:txBody>
       </p:sp>
       <p:sp>
         <p:nvSpPr>
           <p:cNvPr id="48" name="Google Shape;48;p7"/>
-          <p:cNvSpPr txBox="1"/>
+          <p:cNvSpPr txBox="1">
+            <a:spLocks noGrp="1"/>
+          </p:cNvSpPr>
           <p:nvPr>
             <p:ph type="sldNum" idx="12"/>
           </p:nvPr>
@@ -7141,6 +7310,7 @@
             </a:pPr>
             <a:fld id="{00000000-1234-1234-1234-123412341234}" type="slidenum">
               <a:rPr lang="en-US"/>
+              <a:t>‹#›</a:t>
             </a:fld>
             <a:endParaRPr lang="en-US"/>
           </a:p>
@@ -7155,11 +7325,11 @@
 </file>
 
 <file path=ppt/slideLayouts/slideLayout7.xml><?xml version="1.0" encoding="utf-8"?>
-<p:sldLayout xmlns:a="http://schemas.openxmlformats.org/drawingml/2006/main" xmlns:r="http://schemas.openxmlformats.org/officeDocument/2006/relationships" xmlns:p="http://schemas.openxmlformats.org/presentationml/2006/main" type="titleOnly" matchingName="Title Only">
+<p:sldLayout xmlns:a="http://schemas.openxmlformats.org/drawingml/2006/main" xmlns:r="http://schemas.openxmlformats.org/officeDocument/2006/relationships" xmlns:p="http://schemas.openxmlformats.org/presentationml/2006/main" matchingName="Title Only" type="titleOnly">
   <p:cSld name="TITLE_ONLY">
     <p:spTree>
       <p:nvGrpSpPr>
-        <p:cNvPr id="49" name="Shape 49"/>
+        <p:cNvPr id="1" name="Shape 49"/>
         <p:cNvGrpSpPr/>
         <p:nvPr/>
       </p:nvGrpSpPr>
@@ -7174,7 +7344,9 @@
       <p:sp>
         <p:nvSpPr>
           <p:cNvPr id="50" name="Google Shape;50;p8"/>
-          <p:cNvSpPr txBox="1"/>
+          <p:cNvSpPr txBox="1">
+            <a:spLocks noGrp="1"/>
+          </p:cNvSpPr>
           <p:nvPr>
             <p:ph type="title"/>
           </p:nvPr>
@@ -7300,13 +7472,17 @@
               <a:defRPr/>
             </a:lvl9pPr>
           </a:lstStyle>
-          <a:p/>
+          <a:p>
+            <a:endParaRPr/>
+          </a:p>
         </p:txBody>
       </p:sp>
       <p:sp>
         <p:nvSpPr>
           <p:cNvPr id="51" name="Google Shape;51;p8"/>
-          <p:cNvSpPr txBox="1"/>
+          <p:cNvSpPr txBox="1">
+            <a:spLocks noGrp="1"/>
+          </p:cNvSpPr>
           <p:nvPr>
             <p:ph type="dt" idx="10"/>
           </p:nvPr>
@@ -7429,13 +7605,17 @@
               <a:defRPr/>
             </a:lvl9pPr>
           </a:lstStyle>
-          <a:p/>
+          <a:p>
+            <a:endParaRPr/>
+          </a:p>
         </p:txBody>
       </p:sp>
       <p:sp>
         <p:nvSpPr>
           <p:cNvPr id="52" name="Google Shape;52;p8"/>
-          <p:cNvSpPr txBox="1"/>
+          <p:cNvSpPr txBox="1">
+            <a:spLocks noGrp="1"/>
+          </p:cNvSpPr>
           <p:nvPr>
             <p:ph type="ftr" idx="11"/>
           </p:nvPr>
@@ -7558,13 +7738,17 @@
               <a:defRPr/>
             </a:lvl9pPr>
           </a:lstStyle>
-          <a:p/>
+          <a:p>
+            <a:endParaRPr/>
+          </a:p>
         </p:txBody>
       </p:sp>
       <p:sp>
         <p:nvSpPr>
           <p:cNvPr id="53" name="Google Shape;53;p8"/>
-          <p:cNvSpPr txBox="1"/>
+          <p:cNvSpPr txBox="1">
+            <a:spLocks noGrp="1"/>
+          </p:cNvSpPr>
           <p:nvPr>
             <p:ph type="sldNum" idx="12"/>
           </p:nvPr>
@@ -7663,6 +7847,7 @@
             </a:pPr>
             <a:fld id="{00000000-1234-1234-1234-123412341234}" type="slidenum">
               <a:rPr lang="en-US"/>
+              <a:t>‹#›</a:t>
             </a:fld>
             <a:endParaRPr lang="en-US"/>
           </a:p>
@@ -7677,11 +7862,11 @@
 </file>
 
 <file path=ppt/slideLayouts/slideLayout8.xml><?xml version="1.0" encoding="utf-8"?>
-<p:sldLayout xmlns:a="http://schemas.openxmlformats.org/drawingml/2006/main" xmlns:r="http://schemas.openxmlformats.org/officeDocument/2006/relationships" xmlns:p="http://schemas.openxmlformats.org/presentationml/2006/main" type="objTx" matchingName="Content with Caption">
+<p:sldLayout xmlns:a="http://schemas.openxmlformats.org/drawingml/2006/main" xmlns:r="http://schemas.openxmlformats.org/officeDocument/2006/relationships" xmlns:p="http://schemas.openxmlformats.org/presentationml/2006/main" matchingName="Content with Caption" type="objTx">
   <p:cSld name="OBJECT_WITH_CAPTION_TEXT">
     <p:spTree>
       <p:nvGrpSpPr>
-        <p:cNvPr id="54" name="Shape 54"/>
+        <p:cNvPr id="1" name="Shape 54"/>
         <p:cNvGrpSpPr/>
         <p:nvPr/>
       </p:nvGrpSpPr>
@@ -7696,7 +7881,9 @@
       <p:sp>
         <p:nvSpPr>
           <p:cNvPr id="55" name="Google Shape;55;p9"/>
-          <p:cNvSpPr txBox="1"/>
+          <p:cNvSpPr txBox="1">
+            <a:spLocks noGrp="1"/>
+          </p:cNvSpPr>
           <p:nvPr>
             <p:ph type="title"/>
           </p:nvPr>
@@ -7823,13 +8010,17 @@
               <a:defRPr/>
             </a:lvl9pPr>
           </a:lstStyle>
-          <a:p/>
+          <a:p>
+            <a:endParaRPr/>
+          </a:p>
         </p:txBody>
       </p:sp>
       <p:sp>
         <p:nvSpPr>
           <p:cNvPr id="56" name="Google Shape;56;p9"/>
-          <p:cNvSpPr txBox="1"/>
+          <p:cNvSpPr txBox="1">
+            <a:spLocks noGrp="1"/>
+          </p:cNvSpPr>
           <p:nvPr>
             <p:ph type="body" idx="1"/>
           </p:nvPr>
@@ -7979,13 +8170,17 @@
               <a:defRPr sz="2000"/>
             </a:lvl9pPr>
           </a:lstStyle>
-          <a:p/>
+          <a:p>
+            <a:endParaRPr/>
+          </a:p>
         </p:txBody>
       </p:sp>
       <p:sp>
         <p:nvSpPr>
           <p:cNvPr id="57" name="Google Shape;57;p9"/>
-          <p:cNvSpPr txBox="1"/>
+          <p:cNvSpPr txBox="1">
+            <a:spLocks noGrp="1"/>
+          </p:cNvSpPr>
           <p:nvPr>
             <p:ph type="body" idx="2"/>
           </p:nvPr>
@@ -8135,13 +8330,17 @@
               <a:defRPr sz="900"/>
             </a:lvl9pPr>
           </a:lstStyle>
-          <a:p/>
+          <a:p>
+            <a:endParaRPr/>
+          </a:p>
         </p:txBody>
       </p:sp>
       <p:sp>
         <p:nvSpPr>
           <p:cNvPr id="58" name="Google Shape;58;p9"/>
-          <p:cNvSpPr txBox="1"/>
+          <p:cNvSpPr txBox="1">
+            <a:spLocks noGrp="1"/>
+          </p:cNvSpPr>
           <p:nvPr>
             <p:ph type="dt" idx="10"/>
           </p:nvPr>
@@ -8264,13 +8463,17 @@
               <a:defRPr/>
             </a:lvl9pPr>
           </a:lstStyle>
-          <a:p/>
+          <a:p>
+            <a:endParaRPr/>
+          </a:p>
         </p:txBody>
       </p:sp>
       <p:sp>
         <p:nvSpPr>
           <p:cNvPr id="59" name="Google Shape;59;p9"/>
-          <p:cNvSpPr txBox="1"/>
+          <p:cNvSpPr txBox="1">
+            <a:spLocks noGrp="1"/>
+          </p:cNvSpPr>
           <p:nvPr>
             <p:ph type="ftr" idx="11"/>
           </p:nvPr>
@@ -8393,13 +8596,17 @@
               <a:defRPr/>
             </a:lvl9pPr>
           </a:lstStyle>
-          <a:p/>
+          <a:p>
+            <a:endParaRPr/>
+          </a:p>
         </p:txBody>
       </p:sp>
       <p:sp>
         <p:nvSpPr>
           <p:cNvPr id="60" name="Google Shape;60;p9"/>
-          <p:cNvSpPr txBox="1"/>
+          <p:cNvSpPr txBox="1">
+            <a:spLocks noGrp="1"/>
+          </p:cNvSpPr>
           <p:nvPr>
             <p:ph type="sldNum" idx="12"/>
           </p:nvPr>
@@ -8498,6 +8705,7 @@
             </a:pPr>
             <a:fld id="{00000000-1234-1234-1234-123412341234}" type="slidenum">
               <a:rPr lang="en-US"/>
+              <a:t>‹#›</a:t>
             </a:fld>
             <a:endParaRPr lang="en-US"/>
           </a:p>
@@ -8512,11 +8720,11 @@
 </file>
 
 <file path=ppt/slideLayouts/slideLayout9.xml><?xml version="1.0" encoding="utf-8"?>
-<p:sldLayout xmlns:a="http://schemas.openxmlformats.org/drawingml/2006/main" xmlns:r="http://schemas.openxmlformats.org/officeDocument/2006/relationships" xmlns:p="http://schemas.openxmlformats.org/presentationml/2006/main" type="picTx" matchingName="Picture with Caption">
+<p:sldLayout xmlns:a="http://schemas.openxmlformats.org/drawingml/2006/main" xmlns:r="http://schemas.openxmlformats.org/officeDocument/2006/relationships" xmlns:p="http://schemas.openxmlformats.org/presentationml/2006/main" matchingName="Picture with Caption" type="picTx">
   <p:cSld name="PICTURE_WITH_CAPTION_TEXT">
     <p:spTree>
       <p:nvGrpSpPr>
-        <p:cNvPr id="61" name="Shape 61"/>
+        <p:cNvPr id="1" name="Shape 61"/>
         <p:cNvGrpSpPr/>
         <p:nvPr/>
       </p:nvGrpSpPr>
@@ -8531,7 +8739,9 @@
       <p:sp>
         <p:nvSpPr>
           <p:cNvPr id="62" name="Google Shape;62;p10"/>
-          <p:cNvSpPr txBox="1"/>
+          <p:cNvSpPr txBox="1">
+            <a:spLocks noGrp="1"/>
+          </p:cNvSpPr>
           <p:nvPr>
             <p:ph type="title"/>
           </p:nvPr>
@@ -8658,13 +8868,17 @@
               <a:defRPr/>
             </a:lvl9pPr>
           </a:lstStyle>
-          <a:p/>
+          <a:p>
+            <a:endParaRPr/>
+          </a:p>
         </p:txBody>
       </p:sp>
       <p:sp>
         <p:nvSpPr>
           <p:cNvPr id="63" name="Google Shape;63;p10"/>
-          <p:cNvSpPr/>
+          <p:cNvSpPr>
+            <a:spLocks noGrp="1"/>
+          </p:cNvSpPr>
           <p:nvPr>
             <p:ph type="pic" idx="2"/>
           </p:nvPr>
@@ -8686,7 +8900,9 @@
       <p:sp>
         <p:nvSpPr>
           <p:cNvPr id="64" name="Google Shape;64;p10"/>
-          <p:cNvSpPr txBox="1"/>
+          <p:cNvSpPr txBox="1">
+            <a:spLocks noGrp="1"/>
+          </p:cNvSpPr>
           <p:nvPr>
             <p:ph type="body" idx="1"/>
           </p:nvPr>
@@ -8836,13 +9052,17 @@
               <a:defRPr sz="900"/>
             </a:lvl9pPr>
           </a:lstStyle>
-          <a:p/>
+          <a:p>
+            <a:endParaRPr/>
+          </a:p>
         </p:txBody>
       </p:sp>
       <p:sp>
         <p:nvSpPr>
           <p:cNvPr id="65" name="Google Shape;65;p10"/>
-          <p:cNvSpPr txBox="1"/>
+          <p:cNvSpPr txBox="1">
+            <a:spLocks noGrp="1"/>
+          </p:cNvSpPr>
           <p:nvPr>
             <p:ph type="dt" idx="10"/>
           </p:nvPr>
@@ -8965,13 +9185,17 @@
               <a:defRPr/>
             </a:lvl9pPr>
           </a:lstStyle>
-          <a:p/>
+          <a:p>
+            <a:endParaRPr/>
+          </a:p>
         </p:txBody>
       </p:sp>
       <p:sp>
         <p:nvSpPr>
           <p:cNvPr id="66" name="Google Shape;66;p10"/>
-          <p:cNvSpPr txBox="1"/>
+          <p:cNvSpPr txBox="1">
+            <a:spLocks noGrp="1"/>
+          </p:cNvSpPr>
           <p:nvPr>
             <p:ph type="ftr" idx="11"/>
           </p:nvPr>
@@ -9094,13 +9318,17 @@
               <a:defRPr/>
             </a:lvl9pPr>
           </a:lstStyle>
-          <a:p/>
+          <a:p>
+            <a:endParaRPr/>
+          </a:p>
         </p:txBody>
       </p:sp>
       <p:sp>
         <p:nvSpPr>
           <p:cNvPr id="67" name="Google Shape;67;p10"/>
-          <p:cNvSpPr txBox="1"/>
+          <p:cNvSpPr txBox="1">
+            <a:spLocks noGrp="1"/>
+          </p:cNvSpPr>
           <p:nvPr>
             <p:ph type="sldNum" idx="12"/>
           </p:nvPr>
@@ -9199,6 +9427,7 @@
             </a:pPr>
             <a:fld id="{00000000-1234-1234-1234-123412341234}" type="slidenum">
               <a:rPr lang="en-US"/>
+              <a:t>‹#›</a:t>
             </a:fld>
             <a:endParaRPr lang="en-US"/>
           </a:p>
@@ -9225,7 +9454,7 @@
     </p:bg>
     <p:spTree>
       <p:nvGrpSpPr>
-        <p:cNvPr id="5" name="Shape 5"/>
+        <p:cNvPr id="1" name="Shape 5"/>
         <p:cNvGrpSpPr/>
         <p:nvPr/>
       </p:nvGrpSpPr>
@@ -9240,7 +9469,9 @@
       <p:sp>
         <p:nvSpPr>
           <p:cNvPr id="6" name="Google Shape;6;p1"/>
-          <p:cNvSpPr txBox="1"/>
+          <p:cNvSpPr txBox="1">
+            <a:spLocks noGrp="1"/>
+          </p:cNvSpPr>
           <p:nvPr>
             <p:ph type="title"/>
           </p:nvPr>
@@ -9375,13 +9606,17 @@
               <a:defRPr sz="1800"/>
             </a:lvl9pPr>
           </a:lstStyle>
-          <a:p/>
+          <a:p>
+            <a:endParaRPr/>
+          </a:p>
         </p:txBody>
       </p:sp>
       <p:sp>
         <p:nvSpPr>
           <p:cNvPr id="7" name="Google Shape;7;p1"/>
-          <p:cNvSpPr txBox="1"/>
+          <p:cNvSpPr txBox="1">
+            <a:spLocks noGrp="1"/>
+          </p:cNvSpPr>
           <p:nvPr>
             <p:ph type="body" idx="1"/>
           </p:nvPr>
@@ -9612,13 +9847,17 @@
               </a:defRPr>
             </a:lvl9pPr>
           </a:lstStyle>
-          <a:p/>
+          <a:p>
+            <a:endParaRPr/>
+          </a:p>
         </p:txBody>
       </p:sp>
       <p:sp>
         <p:nvSpPr>
           <p:cNvPr id="8" name="Google Shape;8;p1"/>
-          <p:cNvSpPr txBox="1"/>
+          <p:cNvSpPr txBox="1">
+            <a:spLocks noGrp="1"/>
+          </p:cNvSpPr>
           <p:nvPr>
             <p:ph type="dt" idx="10"/>
           </p:nvPr>
@@ -9813,13 +10052,17 @@
               </a:defRPr>
             </a:lvl9pPr>
           </a:lstStyle>
-          <a:p/>
+          <a:p>
+            <a:endParaRPr/>
+          </a:p>
         </p:txBody>
       </p:sp>
       <p:sp>
         <p:nvSpPr>
           <p:cNvPr id="9" name="Google Shape;9;p1"/>
-          <p:cNvSpPr txBox="1"/>
+          <p:cNvSpPr txBox="1">
+            <a:spLocks noGrp="1"/>
+          </p:cNvSpPr>
           <p:nvPr>
             <p:ph type="ftr" idx="11"/>
           </p:nvPr>
@@ -10014,13 +10257,17 @@
               </a:defRPr>
             </a:lvl9pPr>
           </a:lstStyle>
-          <a:p/>
+          <a:p>
+            <a:endParaRPr/>
+          </a:p>
         </p:txBody>
       </p:sp>
       <p:sp>
         <p:nvSpPr>
           <p:cNvPr id="10" name="Google Shape;10;p1"/>
-          <p:cNvSpPr txBox="1"/>
+          <p:cNvSpPr txBox="1">
+            <a:spLocks noGrp="1"/>
+          </p:cNvSpPr>
           <p:nvPr>
             <p:ph type="sldNum" idx="12"/>
           </p:nvPr>
@@ -10191,6 +10438,7 @@
             </a:pPr>
             <a:fld id="{00000000-1234-1234-1234-123412341234}" type="slidenum">
               <a:rPr lang="en-US"/>
+              <a:t>‹#›</a:t>
             </a:fld>
             <a:endParaRPr lang="en-US"/>
           </a:p>
@@ -10918,7 +11166,7 @@
     </p:bg>
     <p:spTree>
       <p:nvGrpSpPr>
-        <p:cNvPr id="83" name="Shape 83"/>
+        <p:cNvPr id="1" name="Shape 83"/>
         <p:cNvGrpSpPr/>
         <p:nvPr/>
       </p:nvGrpSpPr>
@@ -10937,7 +11185,7 @@
           <p:nvPr/>
         </p:nvPicPr>
         <p:blipFill rotWithShape="1">
-          <a:blip r:embed="rId1"/>
+          <a:blip r:embed="rId3"/>
           <a:srcRect/>
           <a:stretch>
             <a:fillRect/>
@@ -10964,7 +11212,7 @@
           <p:nvPr/>
         </p:nvPicPr>
         <p:blipFill rotWithShape="1">
-          <a:blip r:embed="rId2"/>
+          <a:blip r:embed="rId4"/>
           <a:srcRect/>
           <a:stretch>
             <a:fillRect/>
@@ -11068,15 +11316,6 @@
               </a:rPr>
               <a:t> продукции</a:t>
             </a:r>
-            <a:endParaRPr lang="en-US" sz="4800" b="1" i="0" u="none" strike="noStrike" cap="none">
-              <a:solidFill>
-                <a:srgbClr val="1E293B"/>
-              </a:solidFill>
-              <a:latin typeface="Times New Roman" panose="02020603050405020304" charset="0"/>
-              <a:ea typeface="Poppins" panose="00000500000000000000"/>
-              <a:cs typeface="Times New Roman" panose="02020603050405020304" charset="0"/>
-              <a:sym typeface="Poppins" panose="00000500000000000000"/>
-            </a:endParaRPr>
           </a:p>
         </p:txBody>
       </p:sp>
@@ -11129,15 +11368,6 @@
               </a:rPr>
               <a:t>Разработка макета приложения базы данных предприятия</a:t>
             </a:r>
-            <a:endParaRPr lang="en-US" sz="1650" b="0" i="0" u="none" strike="noStrike" cap="none">
-              <a:solidFill>
-                <a:srgbClr val="475569"/>
-              </a:solidFill>
-              <a:latin typeface="Times New Roman" panose="02020603050405020304" charset="0"/>
-              <a:ea typeface="Lato" panose="020F0502020204030203"/>
-              <a:cs typeface="Times New Roman" panose="02020603050405020304" charset="0"/>
-              <a:sym typeface="Lato" panose="020F0502020204030203"/>
-            </a:endParaRPr>
           </a:p>
         </p:txBody>
       </p:sp>
@@ -11190,15 +11420,6 @@
               </a:rPr>
               <a:t>РАЗРАБОТАЛ</a:t>
             </a:r>
-            <a:endParaRPr lang="en-US" sz="1350" b="1" i="0" u="none" strike="noStrike" cap="none">
-              <a:solidFill>
-                <a:srgbClr val="94A3B8"/>
-              </a:solidFill>
-              <a:latin typeface="Times New Roman" panose="02020603050405020304" charset="0"/>
-              <a:ea typeface="Lato" panose="020F0502020204030203"/>
-              <a:cs typeface="Times New Roman" panose="02020603050405020304" charset="0"/>
-              <a:sym typeface="Lato" panose="020F0502020204030203"/>
-            </a:endParaRPr>
           </a:p>
         </p:txBody>
       </p:sp>
@@ -11251,15 +11472,6 @@
               </a:rPr>
               <a:t>Шепелев К. Р., Группа ИП-31</a:t>
             </a:r>
-            <a:endParaRPr lang="en-US" sz="1650" b="0" i="0" u="none" strike="noStrike" cap="none">
-              <a:solidFill>
-                <a:srgbClr val="475569"/>
-              </a:solidFill>
-              <a:latin typeface="Times New Roman" panose="02020603050405020304" charset="0"/>
-              <a:ea typeface="Lato" panose="020F0502020204030203"/>
-              <a:cs typeface="Times New Roman" panose="02020603050405020304" charset="0"/>
-              <a:sym typeface="Lato" panose="020F0502020204030203"/>
-            </a:endParaRPr>
           </a:p>
         </p:txBody>
       </p:sp>
@@ -11312,15 +11524,6 @@
               </a:rPr>
               <a:t>ПРОВЕРИЛ</a:t>
             </a:r>
-            <a:endParaRPr lang="en-US" sz="1350" b="1" i="0" u="none" strike="noStrike" cap="none">
-              <a:solidFill>
-                <a:srgbClr val="94A3B8"/>
-              </a:solidFill>
-              <a:latin typeface="Times New Roman" panose="02020603050405020304" charset="0"/>
-              <a:ea typeface="Lato" panose="020F0502020204030203"/>
-              <a:cs typeface="Times New Roman" panose="02020603050405020304" charset="0"/>
-              <a:sym typeface="Lato" panose="020F0502020204030203"/>
-            </a:endParaRPr>
           </a:p>
         </p:txBody>
       </p:sp>
@@ -11373,15 +11576,383 @@
               </a:rPr>
               <a:t>Назарова И. А.</a:t>
             </a:r>
-            <a:endParaRPr lang="en-US" sz="1650" b="0" i="0" u="none" strike="noStrike" cap="none">
+          </a:p>
+        </p:txBody>
+      </p:sp>
+      <p:sp>
+        <p:nvSpPr>
+          <p:cNvPr id="2" name="TextBox 1">
+            <a:extLst>
+              <a:ext uri="{FF2B5EF4-FFF2-40B4-BE49-F238E27FC236}">
+                <a16:creationId xmlns:a16="http://schemas.microsoft.com/office/drawing/2014/main" id="{19EED60B-3571-9AAB-CE2C-254F4D0E57CE}"/>
+              </a:ext>
+            </a:extLst>
+          </p:cNvPr>
+          <p:cNvSpPr txBox="1"/>
+          <p:nvPr/>
+        </p:nvSpPr>
+        <p:spPr>
+          <a:xfrm>
+            <a:off x="0" y="104064"/>
+            <a:ext cx="12191999" cy="1027269"/>
+          </a:xfrm>
+          <a:prstGeom prst="rect">
+            <a:avLst/>
+          </a:prstGeom>
+          <a:noFill/>
+        </p:spPr>
+        <p:txBody>
+          <a:bodyPr wrap="square">
+            <a:spAutoFit/>
+          </a:bodyPr>
+          <a:lstStyle/>
+          <a:p>
+            <a:pPr algn="ctr">
+              <a:lnSpc>
+                <a:spcPct val="150000"/>
+              </a:lnSpc>
+              <a:buNone/>
+            </a:pPr>
+            <a:r>
+              <a:rPr lang="ru-RU" sz="1400" cap="all" dirty="0">
+                <a:solidFill>
+                  <a:srgbClr val="94A3B8"/>
+                </a:solidFill>
+                <a:effectLst/>
+                <a:latin typeface="Times New Roman" panose="02020603050405020304" pitchFamily="18" charset="0"/>
+                <a:ea typeface="Times New Roman" panose="02020603050405020304" pitchFamily="18" charset="0"/>
+                <a:cs typeface="Times New Roman" panose="02020603050405020304" pitchFamily="18" charset="0"/>
+              </a:rPr>
+              <a:t>МИНИСТЕРСТВО ОБРАЗОВАНИЯ САРАТОВСКОЙ ОБЛАСТИ ГОСУДАРСТВЕННОЕ АВТОНОМНОЕ ПРФЕССИОНАЛЬНОЕ</a:t>
+            </a:r>
+            <a:endParaRPr lang="ru-RU" sz="1100" dirty="0">
               <a:solidFill>
-                <a:srgbClr val="475569"/>
+                <a:srgbClr val="94A3B8"/>
               </a:solidFill>
-              <a:latin typeface="Times New Roman" panose="02020603050405020304" charset="0"/>
-              <a:ea typeface="Lato" panose="020F0502020204030203"/>
-              <a:cs typeface="Times New Roman" panose="02020603050405020304" charset="0"/>
-              <a:sym typeface="Lato" panose="020F0502020204030203"/>
+              <a:effectLst/>
+              <a:latin typeface="Times New Roman" panose="02020603050405020304" pitchFamily="18" charset="0"/>
+              <a:ea typeface="Calibri" panose="020F0502020204030204" pitchFamily="34" charset="0"/>
+              <a:cs typeface="Times New Roman" panose="02020603050405020304" pitchFamily="18" charset="0"/>
             </a:endParaRPr>
+          </a:p>
+          <a:p>
+            <a:pPr algn="ctr">
+              <a:lnSpc>
+                <a:spcPct val="150000"/>
+              </a:lnSpc>
+              <a:buNone/>
+            </a:pPr>
+            <a:r>
+              <a:rPr lang="ru-RU" sz="1400" cap="all" dirty="0">
+                <a:solidFill>
+                  <a:srgbClr val="94A3B8"/>
+                </a:solidFill>
+                <a:effectLst/>
+                <a:latin typeface="Times New Roman" panose="02020603050405020304" pitchFamily="18" charset="0"/>
+                <a:ea typeface="Times New Roman" panose="02020603050405020304" pitchFamily="18" charset="0"/>
+                <a:cs typeface="Times New Roman" panose="02020603050405020304" pitchFamily="18" charset="0"/>
+              </a:rPr>
+              <a:t>ОБРАЗОВАТЕЛЬНОЕ УЧРЕЖДЕНИЕ САРАТОВСКОЙ ОБЛАСТИ</a:t>
+            </a:r>
+            <a:endParaRPr lang="ru-RU" sz="1100" dirty="0">
+              <a:solidFill>
+                <a:srgbClr val="94A3B8"/>
+              </a:solidFill>
+              <a:effectLst/>
+              <a:latin typeface="Times New Roman" panose="02020603050405020304" pitchFamily="18" charset="0"/>
+              <a:ea typeface="Calibri" panose="020F0502020204030204" pitchFamily="34" charset="0"/>
+              <a:cs typeface="Times New Roman" panose="02020603050405020304" pitchFamily="18" charset="0"/>
+            </a:endParaRPr>
+          </a:p>
+          <a:p>
+            <a:pPr algn="ctr">
+              <a:lnSpc>
+                <a:spcPct val="150000"/>
+              </a:lnSpc>
+              <a:buNone/>
+            </a:pPr>
+            <a:r>
+              <a:rPr lang="ru-RU" sz="1400" cap="all" dirty="0">
+                <a:solidFill>
+                  <a:srgbClr val="94A3B8"/>
+                </a:solidFill>
+                <a:effectLst/>
+                <a:latin typeface="Times New Roman" panose="02020603050405020304" pitchFamily="18" charset="0"/>
+                <a:ea typeface="Times New Roman" panose="02020603050405020304" pitchFamily="18" charset="0"/>
+                <a:cs typeface="Times New Roman" panose="02020603050405020304" pitchFamily="18" charset="0"/>
+              </a:rPr>
+              <a:t>«БАЛАШОВСКИЙ ТЕХНИКУМ МЕХАНИЗАЦИИ СЕЛЬСКОГО ХОЗЯЙСТВА»</a:t>
+            </a:r>
+            <a:endParaRPr lang="ru-RU" sz="1100" dirty="0">
+              <a:solidFill>
+                <a:srgbClr val="94A3B8"/>
+              </a:solidFill>
+              <a:effectLst/>
+              <a:latin typeface="Times New Roman" panose="02020603050405020304" pitchFamily="18" charset="0"/>
+              <a:ea typeface="Calibri" panose="020F0502020204030204" pitchFamily="34" charset="0"/>
+              <a:cs typeface="Times New Roman" panose="02020603050405020304" pitchFamily="18" charset="0"/>
+            </a:endParaRPr>
+          </a:p>
+        </p:txBody>
+      </p:sp>
+      <p:sp>
+        <p:nvSpPr>
+          <p:cNvPr id="3" name="Подзаголовок 2">
+            <a:extLst>
+              <a:ext uri="{FF2B5EF4-FFF2-40B4-BE49-F238E27FC236}">
+                <a16:creationId xmlns:a16="http://schemas.microsoft.com/office/drawing/2014/main" id="{7CCBC001-6C48-354B-0763-F75996A0629E}"/>
+              </a:ext>
+            </a:extLst>
+          </p:cNvPr>
+          <p:cNvSpPr txBox="1">
+            <a:spLocks/>
+          </p:cNvSpPr>
+          <p:nvPr/>
+        </p:nvSpPr>
+        <p:spPr>
+          <a:xfrm>
+            <a:off x="2212531" y="6439519"/>
+            <a:ext cx="7766936" cy="1096899"/>
+          </a:xfrm>
+          <a:prstGeom prst="rect">
+            <a:avLst/>
+          </a:prstGeom>
+        </p:spPr>
+        <p:txBody>
+          <a:bodyPr vert="horz" lIns="91440" tIns="45720" rIns="91440" bIns="45720" rtlCol="0" anchor="t">
+            <a:normAutofit/>
+          </a:bodyPr>
+          <a:lstStyle>
+            <a:lvl1pPr marL="0" indent="0" algn="r" defTabSz="457200" rtl="0" eaLnBrk="1" latinLnBrk="0" hangingPunct="1">
+              <a:spcBef>
+                <a:spcPts val="1000"/>
+              </a:spcBef>
+              <a:spcAft>
+                <a:spcPts val="0"/>
+              </a:spcAft>
+              <a:buClr>
+                <a:schemeClr val="accent1"/>
+              </a:buClr>
+              <a:buSzPct val="80000"/>
+              <a:buFont typeface="Wingdings 3" charset="2"/>
+              <a:buNone/>
+              <a:defRPr sz="1800" kern="1200">
+                <a:solidFill>
+                  <a:schemeClr val="tx1">
+                    <a:lumMod val="50000"/>
+                    <a:lumOff val="50000"/>
+                  </a:schemeClr>
+                </a:solidFill>
+                <a:latin typeface="+mn-lt"/>
+                <a:ea typeface="+mn-ea"/>
+                <a:cs typeface="+mn-cs"/>
+              </a:defRPr>
+            </a:lvl1pPr>
+            <a:lvl2pPr marL="457200" indent="0" algn="ctr" defTabSz="457200" rtl="0" eaLnBrk="1" latinLnBrk="0" hangingPunct="1">
+              <a:spcBef>
+                <a:spcPts val="1000"/>
+              </a:spcBef>
+              <a:spcAft>
+                <a:spcPts val="0"/>
+              </a:spcAft>
+              <a:buClr>
+                <a:schemeClr val="accent1"/>
+              </a:buClr>
+              <a:buSzPct val="80000"/>
+              <a:buFont typeface="Wingdings 3" charset="2"/>
+              <a:buNone/>
+              <a:defRPr sz="1600" kern="1200">
+                <a:solidFill>
+                  <a:schemeClr val="tx1">
+                    <a:tint val="75000"/>
+                  </a:schemeClr>
+                </a:solidFill>
+                <a:latin typeface="+mn-lt"/>
+                <a:ea typeface="+mn-ea"/>
+                <a:cs typeface="+mn-cs"/>
+              </a:defRPr>
+            </a:lvl2pPr>
+            <a:lvl3pPr marL="914400" indent="0" algn="ctr" defTabSz="457200" rtl="0" eaLnBrk="1" latinLnBrk="0" hangingPunct="1">
+              <a:spcBef>
+                <a:spcPts val="1000"/>
+              </a:spcBef>
+              <a:spcAft>
+                <a:spcPts val="0"/>
+              </a:spcAft>
+              <a:buClr>
+                <a:schemeClr val="accent1"/>
+              </a:buClr>
+              <a:buSzPct val="80000"/>
+              <a:buFont typeface="Wingdings 3" charset="2"/>
+              <a:buNone/>
+              <a:defRPr sz="1400" kern="1200">
+                <a:solidFill>
+                  <a:schemeClr val="tx1">
+                    <a:tint val="75000"/>
+                  </a:schemeClr>
+                </a:solidFill>
+                <a:latin typeface="+mn-lt"/>
+                <a:ea typeface="+mn-ea"/>
+                <a:cs typeface="+mn-cs"/>
+              </a:defRPr>
+            </a:lvl3pPr>
+            <a:lvl4pPr marL="1371600" indent="0" algn="ctr" defTabSz="457200" rtl="0" eaLnBrk="1" latinLnBrk="0" hangingPunct="1">
+              <a:spcBef>
+                <a:spcPts val="1000"/>
+              </a:spcBef>
+              <a:spcAft>
+                <a:spcPts val="0"/>
+              </a:spcAft>
+              <a:buClr>
+                <a:schemeClr val="accent1"/>
+              </a:buClr>
+              <a:buSzPct val="80000"/>
+              <a:buFont typeface="Wingdings 3" charset="2"/>
+              <a:buNone/>
+              <a:defRPr sz="1200" kern="1200">
+                <a:solidFill>
+                  <a:schemeClr val="tx1">
+                    <a:tint val="75000"/>
+                  </a:schemeClr>
+                </a:solidFill>
+                <a:latin typeface="+mn-lt"/>
+                <a:ea typeface="+mn-ea"/>
+                <a:cs typeface="+mn-cs"/>
+              </a:defRPr>
+            </a:lvl4pPr>
+            <a:lvl5pPr marL="1828800" indent="0" algn="ctr" defTabSz="457200" rtl="0" eaLnBrk="1" latinLnBrk="0" hangingPunct="1">
+              <a:spcBef>
+                <a:spcPts val="1000"/>
+              </a:spcBef>
+              <a:spcAft>
+                <a:spcPts val="0"/>
+              </a:spcAft>
+              <a:buClr>
+                <a:schemeClr val="accent1"/>
+              </a:buClr>
+              <a:buSzPct val="80000"/>
+              <a:buFont typeface="Wingdings 3" charset="2"/>
+              <a:buNone/>
+              <a:defRPr sz="1200" kern="1200">
+                <a:solidFill>
+                  <a:schemeClr val="tx1">
+                    <a:tint val="75000"/>
+                  </a:schemeClr>
+                </a:solidFill>
+                <a:latin typeface="+mn-lt"/>
+                <a:ea typeface="+mn-ea"/>
+                <a:cs typeface="+mn-cs"/>
+              </a:defRPr>
+            </a:lvl5pPr>
+            <a:lvl6pPr marL="2286000" indent="0" algn="ctr" defTabSz="457200" rtl="0" eaLnBrk="1" latinLnBrk="0" hangingPunct="1">
+              <a:spcBef>
+                <a:spcPts val="1000"/>
+              </a:spcBef>
+              <a:spcAft>
+                <a:spcPts val="0"/>
+              </a:spcAft>
+              <a:buClr>
+                <a:schemeClr val="accent1"/>
+              </a:buClr>
+              <a:buSzPct val="80000"/>
+              <a:buFont typeface="Wingdings 3" charset="2"/>
+              <a:buNone/>
+              <a:defRPr sz="1200" kern="1200">
+                <a:solidFill>
+                  <a:schemeClr val="tx1">
+                    <a:tint val="75000"/>
+                  </a:schemeClr>
+                </a:solidFill>
+                <a:latin typeface="+mn-lt"/>
+                <a:ea typeface="+mn-ea"/>
+                <a:cs typeface="+mn-cs"/>
+              </a:defRPr>
+            </a:lvl6pPr>
+            <a:lvl7pPr marL="2743200" indent="0" algn="ctr" defTabSz="457200" rtl="0" eaLnBrk="1" latinLnBrk="0" hangingPunct="1">
+              <a:spcBef>
+                <a:spcPts val="1000"/>
+              </a:spcBef>
+              <a:spcAft>
+                <a:spcPts val="0"/>
+              </a:spcAft>
+              <a:buClr>
+                <a:schemeClr val="accent1"/>
+              </a:buClr>
+              <a:buSzPct val="80000"/>
+              <a:buFont typeface="Wingdings 3" charset="2"/>
+              <a:buNone/>
+              <a:defRPr sz="1200" kern="1200">
+                <a:solidFill>
+                  <a:schemeClr val="tx1">
+                    <a:tint val="75000"/>
+                  </a:schemeClr>
+                </a:solidFill>
+                <a:latin typeface="+mn-lt"/>
+                <a:ea typeface="+mn-ea"/>
+                <a:cs typeface="+mn-cs"/>
+              </a:defRPr>
+            </a:lvl7pPr>
+            <a:lvl8pPr marL="3200400" indent="0" algn="ctr" defTabSz="457200" rtl="0" eaLnBrk="1" latinLnBrk="0" hangingPunct="1">
+              <a:spcBef>
+                <a:spcPts val="1000"/>
+              </a:spcBef>
+              <a:spcAft>
+                <a:spcPts val="0"/>
+              </a:spcAft>
+              <a:buClr>
+                <a:schemeClr val="accent1"/>
+              </a:buClr>
+              <a:buSzPct val="80000"/>
+              <a:buFont typeface="Wingdings 3" charset="2"/>
+              <a:buNone/>
+              <a:defRPr sz="1200" kern="1200">
+                <a:solidFill>
+                  <a:schemeClr val="tx1">
+                    <a:tint val="75000"/>
+                  </a:schemeClr>
+                </a:solidFill>
+                <a:latin typeface="+mn-lt"/>
+                <a:ea typeface="+mn-ea"/>
+                <a:cs typeface="+mn-cs"/>
+              </a:defRPr>
+            </a:lvl8pPr>
+            <a:lvl9pPr marL="3657600" indent="0" algn="ctr" defTabSz="457200" rtl="0" eaLnBrk="1" latinLnBrk="0" hangingPunct="1">
+              <a:spcBef>
+                <a:spcPts val="1000"/>
+              </a:spcBef>
+              <a:spcAft>
+                <a:spcPts val="0"/>
+              </a:spcAft>
+              <a:buClr>
+                <a:schemeClr val="accent1"/>
+              </a:buClr>
+              <a:buSzPct val="80000"/>
+              <a:buFont typeface="Wingdings 3" charset="2"/>
+              <a:buNone/>
+              <a:defRPr sz="1200" kern="1200">
+                <a:solidFill>
+                  <a:schemeClr val="tx1">
+                    <a:tint val="75000"/>
+                  </a:schemeClr>
+                </a:solidFill>
+                <a:latin typeface="+mn-lt"/>
+                <a:ea typeface="+mn-ea"/>
+                <a:cs typeface="+mn-cs"/>
+              </a:defRPr>
+            </a:lvl9pPr>
+          </a:lstStyle>
+          <a:p>
+            <a:pPr algn="ctr"/>
+            <a:r>
+              <a:rPr lang="ru-RU" sz="1200" dirty="0">
+                <a:solidFill>
+                  <a:srgbClr val="94A3B8"/>
+                </a:solidFill>
+                <a:latin typeface="Times New Roman" panose="02020603050405020304" pitchFamily="18" charset="0"/>
+                <a:cs typeface="Times New Roman" panose="02020603050405020304" pitchFamily="18" charset="0"/>
+              </a:rPr>
+              <a:t>Балашов 2026</a:t>
+            </a:r>
           </a:p>
         </p:txBody>
       </p:sp>
@@ -11406,7 +11977,7 @@
     </p:bg>
     <p:spTree>
       <p:nvGrpSpPr>
-        <p:cNvPr id="95" name="Shape 95"/>
+        <p:cNvPr id="1" name="Shape 95"/>
         <p:cNvGrpSpPr/>
         <p:nvPr/>
       </p:nvGrpSpPr>
@@ -11425,7 +11996,7 @@
           <p:nvPr/>
         </p:nvPicPr>
         <p:blipFill rotWithShape="1">
-          <a:blip r:embed="rId1"/>
+          <a:blip r:embed="rId3"/>
           <a:srcRect/>
           <a:stretch>
             <a:fillRect/>
@@ -11452,7 +12023,7 @@
           <p:nvPr/>
         </p:nvPicPr>
         <p:blipFill rotWithShape="1">
-          <a:blip r:embed="rId2"/>
+          <a:blip r:embed="rId4"/>
           <a:srcRect/>
           <a:stretch>
             <a:fillRect/>
@@ -11479,7 +12050,7 @@
           <p:nvPr/>
         </p:nvPicPr>
         <p:blipFill rotWithShape="1">
-          <a:blip r:embed="rId3"/>
+          <a:blip r:embed="rId5"/>
           <a:srcRect/>
           <a:stretch>
             <a:fillRect/>
@@ -11506,7 +12077,7 @@
           <p:nvPr/>
         </p:nvPicPr>
         <p:blipFill rotWithShape="1">
-          <a:blip r:embed="rId4"/>
+          <a:blip r:embed="rId6"/>
           <a:srcRect/>
           <a:stretch>
             <a:fillRect/>
@@ -11572,15 +12143,6 @@
               </a:rPr>
               <a:t>Цель проекта</a:t>
             </a:r>
-            <a:endParaRPr lang="en-US" sz="1800" b="1" i="0" u="none" strike="noStrike" cap="none">
-              <a:solidFill>
-                <a:srgbClr val="1E293B"/>
-              </a:solidFill>
-              <a:latin typeface="Times New Roman" panose="02020603050405020304" charset="0"/>
-              <a:ea typeface="Poppins" panose="00000500000000000000"/>
-              <a:cs typeface="Times New Roman" panose="02020603050405020304" charset="0"/>
-              <a:sym typeface="Poppins" panose="00000500000000000000"/>
-            </a:endParaRPr>
           </a:p>
         </p:txBody>
       </p:sp>
@@ -11633,15 +12195,6 @@
               </a:rPr>
               <a:t>Создание системы для автоматизированного учета затрат и расчета себестоимости изделий.</a:t>
             </a:r>
-            <a:endParaRPr lang="en-US" sz="1650" b="0" i="0" u="none" strike="noStrike" cap="none">
-              <a:solidFill>
-                <a:srgbClr val="475569"/>
-              </a:solidFill>
-              <a:latin typeface="Times New Roman" panose="02020603050405020304" charset="0"/>
-              <a:ea typeface="Lato" panose="020F0502020204030203"/>
-              <a:cs typeface="Times New Roman" panose="02020603050405020304" charset="0"/>
-              <a:sym typeface="Lato" panose="020F0502020204030203"/>
-            </a:endParaRPr>
           </a:p>
         </p:txBody>
       </p:sp>
@@ -11691,15 +12244,6 @@
               </a:rPr>
               <a:t>Задачи</a:t>
             </a:r>
-            <a:endParaRPr lang="en-US" sz="1800" b="1" i="0" u="none" strike="noStrike" cap="none">
-              <a:solidFill>
-                <a:srgbClr val="1E293B"/>
-              </a:solidFill>
-              <a:latin typeface="Times New Roman" panose="02020603050405020304" charset="0"/>
-              <a:ea typeface="Poppins" panose="00000500000000000000"/>
-              <a:cs typeface="Times New Roman" panose="02020603050405020304" charset="0"/>
-              <a:sym typeface="Poppins" panose="00000500000000000000"/>
-            </a:endParaRPr>
           </a:p>
         </p:txBody>
       </p:sp>
@@ -11752,15 +12296,6 @@
               </a:rPr>
               <a:t>Проектирование БД, разработка WPF интерфейса и внедрение алгоритмов расчета.</a:t>
             </a:r>
-            <a:endParaRPr lang="en-US" sz="1650" b="0" i="0" u="none" strike="noStrike" cap="none">
-              <a:solidFill>
-                <a:srgbClr val="475569"/>
-              </a:solidFill>
-              <a:latin typeface="Times New Roman" panose="02020603050405020304" charset="0"/>
-              <a:ea typeface="Lato" panose="020F0502020204030203"/>
-              <a:cs typeface="Times New Roman" panose="02020603050405020304" charset="0"/>
-              <a:sym typeface="Lato" panose="020F0502020204030203"/>
-            </a:endParaRPr>
           </a:p>
         </p:txBody>
       </p:sp>
@@ -11810,15 +12345,6 @@
               </a:rPr>
               <a:t>Надежность</a:t>
             </a:r>
-            <a:endParaRPr lang="en-US" sz="1800" b="1" i="0" u="none" strike="noStrike" cap="none">
-              <a:solidFill>
-                <a:srgbClr val="1E293B"/>
-              </a:solidFill>
-              <a:latin typeface="Times New Roman" panose="02020603050405020304" charset="0"/>
-              <a:ea typeface="Poppins" panose="00000500000000000000"/>
-              <a:cs typeface="Times New Roman" panose="02020603050405020304" charset="0"/>
-              <a:sym typeface="Poppins" panose="00000500000000000000"/>
-            </a:endParaRPr>
           </a:p>
         </p:txBody>
       </p:sp>
@@ -11871,15 +12397,6 @@
               </a:rPr>
               <a:t>Обеспечение защиты данных и строгой ссылочной целостности всех таблиц.</a:t>
             </a:r>
-            <a:endParaRPr lang="en-US" sz="1650" b="0" i="0" u="none" strike="noStrike" cap="none">
-              <a:solidFill>
-                <a:srgbClr val="475569"/>
-              </a:solidFill>
-              <a:latin typeface="Times New Roman" panose="02020603050405020304" charset="0"/>
-              <a:ea typeface="Lato" panose="020F0502020204030203"/>
-              <a:cs typeface="Times New Roman" panose="02020603050405020304" charset="0"/>
-              <a:sym typeface="Lato" panose="020F0502020204030203"/>
-            </a:endParaRPr>
           </a:p>
         </p:txBody>
       </p:sp>
@@ -11890,7 +12407,7 @@
           <p:nvPr/>
         </p:nvPicPr>
         <p:blipFill rotWithShape="1">
-          <a:blip r:embed="rId5"/>
+          <a:blip r:embed="rId7"/>
           <a:srcRect/>
           <a:stretch>
             <a:fillRect/>
@@ -11917,7 +12434,7 @@
           <p:nvPr/>
         </p:nvPicPr>
         <p:blipFill rotWithShape="1">
-          <a:blip r:embed="rId6"/>
+          <a:blip r:embed="rId8"/>
           <a:srcRect/>
           <a:stretch>
             <a:fillRect/>
@@ -11944,7 +12461,7 @@
           <p:nvPr/>
         </p:nvPicPr>
         <p:blipFill rotWithShape="1">
-          <a:blip r:embed="rId7"/>
+          <a:blip r:embed="rId9"/>
           <a:srcRect/>
           <a:stretch>
             <a:fillRect/>
@@ -12010,15 +12527,6 @@
               </a:rPr>
               <a:t>Цели и задачи проекта</a:t>
             </a:r>
-            <a:endParaRPr lang="en-US" sz="3150" b="0" i="0" u="none" strike="noStrike" cap="none">
-              <a:solidFill>
-                <a:srgbClr val="1E293B"/>
-              </a:solidFill>
-              <a:latin typeface="Times New Roman" panose="02020603050405020304" charset="0"/>
-              <a:ea typeface="Poppins SemiBold" panose="00000500000000000000"/>
-              <a:cs typeface="Times New Roman" panose="02020603050405020304" charset="0"/>
-              <a:sym typeface="Poppins SemiBold" panose="00000500000000000000"/>
-            </a:endParaRPr>
           </a:p>
         </p:txBody>
       </p:sp>
@@ -12091,7 +12599,7 @@
     </p:bg>
     <p:spTree>
       <p:nvGrpSpPr>
-        <p:cNvPr id="114" name="Shape 114"/>
+        <p:cNvPr id="1" name="Shape 114"/>
         <p:cNvGrpSpPr/>
         <p:nvPr/>
       </p:nvGrpSpPr>
@@ -12110,7 +12618,7 @@
           <p:nvPr/>
         </p:nvPicPr>
         <p:blipFill rotWithShape="1">
-          <a:blip r:embed="rId1"/>
+          <a:blip r:embed="rId3"/>
           <a:srcRect/>
           <a:stretch>
             <a:fillRect/>
@@ -12179,15 +12687,6 @@
               </a:rPr>
               <a:t>Исключение ошибок ручного счета в сложных многокомпонентных рецептурах.</a:t>
             </a:r>
-            <a:endParaRPr lang="en-US" sz="1650" b="0" i="0" u="none" strike="noStrike" cap="none">
-              <a:solidFill>
-                <a:srgbClr val="475569"/>
-              </a:solidFill>
-              <a:latin typeface="Times New Roman" panose="02020603050405020304" charset="0"/>
-              <a:ea typeface="Lato" panose="020F0502020204030203"/>
-              <a:cs typeface="Times New Roman" panose="02020603050405020304" charset="0"/>
-              <a:sym typeface="Lato" panose="020F0502020204030203"/>
-            </a:endParaRPr>
           </a:p>
         </p:txBody>
       </p:sp>
@@ -12240,15 +12739,6 @@
               </a:rPr>
               <a:t>Мгновенный пересчет цен всей линейки товаров при изменении стоимости сырья.</a:t>
             </a:r>
-            <a:endParaRPr lang="en-US" sz="1650" b="0" i="0" u="none" strike="noStrike" cap="none">
-              <a:solidFill>
-                <a:srgbClr val="475569"/>
-              </a:solidFill>
-              <a:latin typeface="Times New Roman" panose="02020603050405020304" charset="0"/>
-              <a:ea typeface="Lato" panose="020F0502020204030203"/>
-              <a:cs typeface="Times New Roman" panose="02020603050405020304" charset="0"/>
-              <a:sym typeface="Lato" panose="020F0502020204030203"/>
-            </a:endParaRPr>
           </a:p>
         </p:txBody>
       </p:sp>
@@ -12301,15 +12791,6 @@
               </a:rPr>
               <a:t>Централизованное хранение всех технологических карт и спецификаций в единой базе.</a:t>
             </a:r>
-            <a:endParaRPr lang="en-US" sz="1650" b="0" i="0" u="none" strike="noStrike" cap="none">
-              <a:solidFill>
-                <a:srgbClr val="475569"/>
-              </a:solidFill>
-              <a:latin typeface="Times New Roman" panose="02020603050405020304" charset="0"/>
-              <a:ea typeface="Lato" panose="020F0502020204030203"/>
-              <a:cs typeface="Times New Roman" panose="02020603050405020304" charset="0"/>
-              <a:sym typeface="Lato" panose="020F0502020204030203"/>
-            </a:endParaRPr>
           </a:p>
         </p:txBody>
       </p:sp>
@@ -12362,15 +12843,6 @@
               </a:rPr>
               <a:t>Повышение прозрачности ценообразования для руководства предприятия.</a:t>
             </a:r>
-            <a:endParaRPr lang="en-US" sz="1650" b="0" i="0" u="none" strike="noStrike" cap="none">
-              <a:solidFill>
-                <a:srgbClr val="475569"/>
-              </a:solidFill>
-              <a:latin typeface="Times New Roman" panose="02020603050405020304" charset="0"/>
-              <a:ea typeface="Lato" panose="020F0502020204030203"/>
-              <a:cs typeface="Times New Roman" panose="02020603050405020304" charset="0"/>
-              <a:sym typeface="Lato" panose="020F0502020204030203"/>
-            </a:endParaRPr>
           </a:p>
         </p:txBody>
       </p:sp>
@@ -12381,7 +12853,7 @@
           <p:nvPr/>
         </p:nvPicPr>
         <p:blipFill rotWithShape="1">
-          <a:blip r:embed="rId2"/>
+          <a:blip r:embed="rId4"/>
           <a:srcRect/>
           <a:stretch>
             <a:fillRect/>
@@ -12408,7 +12880,7 @@
           <p:nvPr/>
         </p:nvPicPr>
         <p:blipFill rotWithShape="1">
-          <a:blip r:embed="rId2"/>
+          <a:blip r:embed="rId4"/>
           <a:srcRect/>
           <a:stretch>
             <a:fillRect/>
@@ -12435,7 +12907,7 @@
           <p:nvPr/>
         </p:nvPicPr>
         <p:blipFill rotWithShape="1">
-          <a:blip r:embed="rId2"/>
+          <a:blip r:embed="rId4"/>
           <a:srcRect/>
           <a:stretch>
             <a:fillRect/>
@@ -12462,7 +12934,7 @@
           <p:nvPr/>
         </p:nvPicPr>
         <p:blipFill rotWithShape="1">
-          <a:blip r:embed="rId2"/>
+          <a:blip r:embed="rId4"/>
           <a:srcRect/>
           <a:stretch>
             <a:fillRect/>
@@ -12528,15 +13000,6 @@
               </a:rPr>
               <a:t>Актуальность проекта</a:t>
             </a:r>
-            <a:endParaRPr lang="en-US" sz="3150" b="0" i="0" u="none" strike="noStrike" cap="none">
-              <a:solidFill>
-                <a:srgbClr val="1E293B"/>
-              </a:solidFill>
-              <a:latin typeface="Times New Roman" panose="02020603050405020304" charset="0"/>
-              <a:ea typeface="Poppins SemiBold" panose="00000500000000000000"/>
-              <a:cs typeface="Times New Roman" panose="02020603050405020304" charset="0"/>
-              <a:sym typeface="Poppins SemiBold" panose="00000500000000000000"/>
-            </a:endParaRPr>
           </a:p>
         </p:txBody>
       </p:sp>
@@ -12609,7 +13072,7 @@
     </p:bg>
     <p:spTree>
       <p:nvGrpSpPr>
-        <p:cNvPr id="129" name="Shape 129"/>
+        <p:cNvPr id="1" name="Shape 129"/>
         <p:cNvGrpSpPr/>
         <p:nvPr/>
       </p:nvGrpSpPr>
@@ -12628,7 +13091,7 @@
           <p:nvPr/>
         </p:nvPicPr>
         <p:blipFill rotWithShape="1">
-          <a:blip r:embed="rId1"/>
+          <a:blip r:embed="rId3"/>
           <a:srcRect/>
           <a:stretch>
             <a:fillRect/>
@@ -12655,7 +13118,7 @@
           <p:nvPr/>
         </p:nvPicPr>
         <p:blipFill rotWithShape="1">
-          <a:blip r:embed="rId2"/>
+          <a:blip r:embed="rId4"/>
           <a:srcRect/>
           <a:stretch>
             <a:fillRect/>
@@ -12724,15 +13187,6 @@
               </a:rPr>
               <a:t>Автоматизация охватывает полный цикл производственного учета:</a:t>
             </a:r>
-            <a:endParaRPr lang="en-US" sz="1650" b="0" i="0" u="none" strike="noStrike" cap="none">
-              <a:solidFill>
-                <a:srgbClr val="475569"/>
-              </a:solidFill>
-              <a:latin typeface="Times New Roman" panose="02020603050405020304" charset="0"/>
-              <a:ea typeface="Lato" panose="020F0502020204030203"/>
-              <a:cs typeface="Times New Roman" panose="02020603050405020304" charset="0"/>
-              <a:sym typeface="Lato" panose="020F0502020204030203"/>
-            </a:endParaRPr>
           </a:p>
         </p:txBody>
       </p:sp>
@@ -12743,7 +13197,7 @@
           <p:nvPr/>
         </p:nvPicPr>
         <p:blipFill rotWithShape="1">
-          <a:blip r:embed="rId3"/>
+          <a:blip r:embed="rId5"/>
           <a:srcRect/>
           <a:stretch>
             <a:fillRect/>
@@ -12812,15 +13266,6 @@
               </a:rPr>
               <a:t>Регистрация сырья и мониторинг цен.</a:t>
             </a:r>
-            <a:endParaRPr lang="en-US" sz="1350" b="0" i="0" u="none" strike="noStrike" cap="none">
-              <a:solidFill>
-                <a:srgbClr val="475569"/>
-              </a:solidFill>
-              <a:latin typeface="Times New Roman" panose="02020603050405020304" charset="0"/>
-              <a:ea typeface="Lato" panose="020F0502020204030203"/>
-              <a:cs typeface="Times New Roman" panose="02020603050405020304" charset="0"/>
-              <a:sym typeface="Lato" panose="020F0502020204030203"/>
-            </a:endParaRPr>
           </a:p>
         </p:txBody>
       </p:sp>
@@ -12873,15 +13318,6 @@
               </a:rPr>
               <a:t>Формирование состава продукции.</a:t>
             </a:r>
-            <a:endParaRPr lang="en-US" sz="1350" b="0" i="0" u="none" strike="noStrike" cap="none">
-              <a:solidFill>
-                <a:srgbClr val="475569"/>
-              </a:solidFill>
-              <a:latin typeface="Times New Roman" panose="02020603050405020304" charset="0"/>
-              <a:ea typeface="Lato" panose="020F0502020204030203"/>
-              <a:cs typeface="Times New Roman" panose="02020603050405020304" charset="0"/>
-              <a:sym typeface="Lato" panose="020F0502020204030203"/>
-            </a:endParaRPr>
           </a:p>
         </p:txBody>
       </p:sp>
@@ -12934,15 +13370,6 @@
               </a:rPr>
               <a:t>Учет трудозатрат и накладных расходов.</a:t>
             </a:r>
-            <a:endParaRPr lang="en-US" sz="1350" b="0" i="0" u="none" strike="noStrike" cap="none">
-              <a:solidFill>
-                <a:srgbClr val="475569"/>
-              </a:solidFill>
-              <a:latin typeface="Times New Roman" panose="02020603050405020304" charset="0"/>
-              <a:ea typeface="Lato" panose="020F0502020204030203"/>
-              <a:cs typeface="Times New Roman" panose="02020603050405020304" charset="0"/>
-              <a:sym typeface="Lato" panose="020F0502020204030203"/>
-            </a:endParaRPr>
           </a:p>
         </p:txBody>
       </p:sp>
@@ -12995,15 +13422,6 @@
               </a:rPr>
               <a:t>Финальный расчет и анализ маржинальности.</a:t>
             </a:r>
-            <a:endParaRPr lang="en-US" sz="1350" b="0" i="0" u="none" strike="noStrike" cap="none">
-              <a:solidFill>
-                <a:srgbClr val="475569"/>
-              </a:solidFill>
-              <a:latin typeface="Times New Roman" panose="02020603050405020304" charset="0"/>
-              <a:ea typeface="Lato" panose="020F0502020204030203"/>
-              <a:cs typeface="Times New Roman" panose="02020603050405020304" charset="0"/>
-              <a:sym typeface="Lato" panose="020F0502020204030203"/>
-            </a:endParaRPr>
           </a:p>
         </p:txBody>
       </p:sp>
@@ -13014,7 +13432,7 @@
           <p:nvPr/>
         </p:nvPicPr>
         <p:blipFill rotWithShape="1">
-          <a:blip r:embed="rId4"/>
+          <a:blip r:embed="rId6"/>
           <a:srcRect/>
           <a:stretch>
             <a:fillRect/>
@@ -13041,7 +13459,7 @@
           <p:nvPr/>
         </p:nvPicPr>
         <p:blipFill rotWithShape="1">
-          <a:blip r:embed="rId4"/>
+          <a:blip r:embed="rId6"/>
           <a:srcRect/>
           <a:stretch>
             <a:fillRect/>
@@ -13068,7 +13486,7 @@
           <p:nvPr/>
         </p:nvPicPr>
         <p:blipFill rotWithShape="1">
-          <a:blip r:embed="rId4"/>
+          <a:blip r:embed="rId6"/>
           <a:srcRect/>
           <a:stretch>
             <a:fillRect/>
@@ -13095,7 +13513,7 @@
           <p:nvPr/>
         </p:nvPicPr>
         <p:blipFill rotWithShape="1">
-          <a:blip r:embed="rId4"/>
+          <a:blip r:embed="rId6"/>
           <a:srcRect/>
           <a:stretch>
             <a:fillRect/>
@@ -13161,15 +13579,6 @@
               </a:rPr>
               <a:t>Процессы организации</a:t>
             </a:r>
-            <a:endParaRPr lang="en-US" sz="3150" b="0" i="0" u="none" strike="noStrike" cap="none">
-              <a:solidFill>
-                <a:srgbClr val="1E293B"/>
-              </a:solidFill>
-              <a:latin typeface="Times New Roman" panose="02020603050405020304" charset="0"/>
-              <a:ea typeface="Poppins SemiBold" panose="00000500000000000000"/>
-              <a:cs typeface="Times New Roman" panose="02020603050405020304" charset="0"/>
-              <a:sym typeface="Poppins SemiBold" panose="00000500000000000000"/>
-            </a:endParaRPr>
           </a:p>
         </p:txBody>
       </p:sp>
@@ -13242,7 +13651,7 @@
     </p:bg>
     <p:spTree>
       <p:nvGrpSpPr>
-        <p:cNvPr id="147" name="Shape 147"/>
+        <p:cNvPr id="1" name="Shape 147"/>
         <p:cNvGrpSpPr/>
         <p:nvPr/>
       </p:nvGrpSpPr>
@@ -13261,7 +13670,7 @@
           <p:nvPr/>
         </p:nvPicPr>
         <p:blipFill rotWithShape="1">
-          <a:blip r:embed="rId1"/>
+          <a:blip r:embed="rId3"/>
           <a:srcRect/>
           <a:stretch>
             <a:fillRect/>
@@ -13288,7 +13697,7 @@
           <p:nvPr/>
         </p:nvPicPr>
         <p:blipFill rotWithShape="1">
-          <a:blip r:embed="rId2"/>
+          <a:blip r:embed="rId4"/>
           <a:srcRect/>
           <a:stretch>
             <a:fillRect/>
@@ -13326,8 +13735,20 @@
                 <a:tableStyleId>{201B84BC-93BE-4C97-86AC-F209B322F11C}</a:tableStyleId>
               </a:tblPr>
               <a:tblGrid>
-                <a:gridCol w="2091625"/>
-                <a:gridCol w="8538275"/>
+                <a:gridCol w="2091625">
+                  <a:extLst>
+                    <a:ext uri="{9D8B030D-6E8A-4147-A177-3AD203B41FA5}">
+                      <a16:colId xmlns:a16="http://schemas.microsoft.com/office/drawing/2014/main" val="20000"/>
+                    </a:ext>
+                  </a:extLst>
+                </a:gridCol>
+                <a:gridCol w="8538275">
+                  <a:extLst>
+                    <a:ext uri="{9D8B030D-6E8A-4147-A177-3AD203B41FA5}">
+                      <a16:colId xmlns:a16="http://schemas.microsoft.com/office/drawing/2014/main" val="20001"/>
+                    </a:ext>
+                  </a:extLst>
+                </a:gridCol>
               </a:tblGrid>
               <a:tr h="588650">
                 <a:tc>
@@ -13356,15 +13777,6 @@
                         </a:rPr>
                         <a:t>Таблица</a:t>
                       </a:r>
-                      <a:endParaRPr lang="en-US" sz="1200" b="1" i="0" u="none" strike="noStrike" cap="none">
-                        <a:solidFill>
-                          <a:srgbClr val="1E293B"/>
-                        </a:solidFill>
-                        <a:latin typeface="Times New Roman" panose="02020603050405020304" charset="0"/>
-                        <a:ea typeface="Poppins" panose="00000500000000000000"/>
-                        <a:cs typeface="Times New Roman" panose="02020603050405020304" charset="0"/>
-                        <a:sym typeface="Poppins" panose="00000500000000000000"/>
-                      </a:endParaRPr>
                     </a:p>
                   </a:txBody>
                   <a:tcPr marL="63500" marR="63500" marT="25400" marB="25400" anchor="ctr">
@@ -13443,15 +13855,6 @@
                         </a:rPr>
                         <a:t>Описание назначения</a:t>
                       </a:r>
-                      <a:endParaRPr lang="en-US" sz="1200" b="1" i="0" u="none" strike="noStrike" cap="none">
-                        <a:solidFill>
-                          <a:srgbClr val="1E293B"/>
-                        </a:solidFill>
-                        <a:latin typeface="Times New Roman" panose="02020603050405020304" charset="0"/>
-                        <a:ea typeface="Poppins" panose="00000500000000000000"/>
-                        <a:cs typeface="Times New Roman" panose="02020603050405020304" charset="0"/>
-                        <a:sym typeface="Poppins" panose="00000500000000000000"/>
-                      </a:endParaRPr>
                     </a:p>
                   </a:txBody>
                   <a:tcPr marL="63500" marR="63500" marT="25400" marB="25400" anchor="ctr">
@@ -13504,6 +13907,11 @@
                     </a:solidFill>
                   </a:tcPr>
                 </a:tc>
+                <a:extLst>
+                  <a:ext uri="{0D108BD9-81ED-4DB2-BD59-A6C34878D82A}">
+                    <a16:rowId xmlns:a16="http://schemas.microsoft.com/office/drawing/2014/main" val="10000"/>
+                  </a:ext>
+                </a:extLst>
               </a:tr>
               <a:tr h="588650">
                 <a:tc>
@@ -13532,15 +13940,6 @@
                         </a:rPr>
                         <a:t>Материалы</a:t>
                       </a:r>
-                      <a:endParaRPr lang="en-US" sz="1200" b="1" i="0" u="none" strike="noStrike" cap="none">
-                        <a:solidFill>
-                          <a:srgbClr val="000000"/>
-                        </a:solidFill>
-                        <a:latin typeface="Times New Roman" panose="02020603050405020304" charset="0"/>
-                        <a:ea typeface="Lato" panose="020F0502020204030203"/>
-                        <a:cs typeface="Times New Roman" panose="02020603050405020304" charset="0"/>
-                        <a:sym typeface="Lato" panose="020F0502020204030203"/>
-                      </a:endParaRPr>
                     </a:p>
                   </a:txBody>
                   <a:tcPr marL="63500" marR="63500" marT="25400" marB="25400" anchor="ctr">
@@ -13616,15 +14015,6 @@
                         </a:rPr>
                         <a:t>Справочник используемого сырья, цен и единиц измерения.</a:t>
                       </a:r>
-                      <a:endParaRPr lang="en-US" sz="1200" b="0" i="0" u="none" strike="noStrike" cap="none">
-                        <a:solidFill>
-                          <a:srgbClr val="000000"/>
-                        </a:solidFill>
-                        <a:latin typeface="Times New Roman" panose="02020603050405020304" charset="0"/>
-                        <a:ea typeface="Lato" panose="020F0502020204030203"/>
-                        <a:cs typeface="Times New Roman" panose="02020603050405020304" charset="0"/>
-                        <a:sym typeface="Lato" panose="020F0502020204030203"/>
-                      </a:endParaRPr>
                     </a:p>
                   </a:txBody>
                   <a:tcPr marL="63500" marR="63500" marT="25400" marB="25400" anchor="ctr">
@@ -13674,6 +14064,11 @@
                     </a:lnB>
                   </a:tcPr>
                 </a:tc>
+                <a:extLst>
+                  <a:ext uri="{0D108BD9-81ED-4DB2-BD59-A6C34878D82A}">
+                    <a16:rowId xmlns:a16="http://schemas.microsoft.com/office/drawing/2014/main" val="10001"/>
+                  </a:ext>
+                </a:extLst>
               </a:tr>
               <a:tr h="588650">
                 <a:tc>
@@ -13702,15 +14097,6 @@
                         </a:rPr>
                         <a:t>Продукция</a:t>
                       </a:r>
-                      <a:endParaRPr lang="en-US" sz="1200" b="1" i="0" u="none" strike="noStrike" cap="none">
-                        <a:solidFill>
-                          <a:srgbClr val="000000"/>
-                        </a:solidFill>
-                        <a:latin typeface="Times New Roman" panose="02020603050405020304" charset="0"/>
-                        <a:ea typeface="Lato" panose="020F0502020204030203"/>
-                        <a:cs typeface="Times New Roman" panose="02020603050405020304" charset="0"/>
-                        <a:sym typeface="Lato" panose="020F0502020204030203"/>
-                      </a:endParaRPr>
                     </a:p>
                   </a:txBody>
                   <a:tcPr marL="63500" marR="63500" marT="25400" marB="25400" anchor="ctr">
@@ -13786,15 +14172,6 @@
                         </a:rPr>
                         <a:t>Каталог выпускаемых изделий и итоговых экономических расчетов.</a:t>
                       </a:r>
-                      <a:endParaRPr lang="en-US" sz="1200" b="0" i="0" u="none" strike="noStrike" cap="none">
-                        <a:solidFill>
-                          <a:srgbClr val="000000"/>
-                        </a:solidFill>
-                        <a:latin typeface="Times New Roman" panose="02020603050405020304" charset="0"/>
-                        <a:ea typeface="Lato" panose="020F0502020204030203"/>
-                        <a:cs typeface="Times New Roman" panose="02020603050405020304" charset="0"/>
-                        <a:sym typeface="Lato" panose="020F0502020204030203"/>
-                      </a:endParaRPr>
                     </a:p>
                   </a:txBody>
                   <a:tcPr marL="63500" marR="63500" marT="25400" marB="25400" anchor="ctr">
@@ -13844,6 +14221,11 @@
                     </a:lnB>
                   </a:tcPr>
                 </a:tc>
+                <a:extLst>
+                  <a:ext uri="{0D108BD9-81ED-4DB2-BD59-A6C34878D82A}">
+                    <a16:rowId xmlns:a16="http://schemas.microsoft.com/office/drawing/2014/main" val="10002"/>
+                  </a:ext>
+                </a:extLst>
               </a:tr>
               <a:tr h="588650">
                 <a:tc>
@@ -13872,15 +14254,6 @@
                         </a:rPr>
                         <a:t>Состав</a:t>
                       </a:r>
-                      <a:endParaRPr lang="en-US" sz="1200" b="1" i="0" u="none" strike="noStrike" cap="none">
-                        <a:solidFill>
-                          <a:srgbClr val="000000"/>
-                        </a:solidFill>
-                        <a:latin typeface="Times New Roman" panose="02020603050405020304" charset="0"/>
-                        <a:ea typeface="Lato" panose="020F0502020204030203"/>
-                        <a:cs typeface="Times New Roman" panose="02020603050405020304" charset="0"/>
-                        <a:sym typeface="Lato" panose="020F0502020204030203"/>
-                      </a:endParaRPr>
                     </a:p>
                   </a:txBody>
                   <a:tcPr marL="63500" marR="63500" marT="25400" marB="25400" anchor="ctr">
@@ -13956,15 +14329,6 @@
                         </a:rPr>
                         <a:t>Технологические рецептуры (связь Many-to-Many между продуктом и сырьем).</a:t>
                       </a:r>
-                      <a:endParaRPr lang="en-US" sz="1200" b="0" i="0" u="none" strike="noStrike" cap="none">
-                        <a:solidFill>
-                          <a:srgbClr val="000000"/>
-                        </a:solidFill>
-                        <a:latin typeface="Times New Roman" panose="02020603050405020304" charset="0"/>
-                        <a:ea typeface="Lato" panose="020F0502020204030203"/>
-                        <a:cs typeface="Times New Roman" panose="02020603050405020304" charset="0"/>
-                        <a:sym typeface="Lato" panose="020F0502020204030203"/>
-                      </a:endParaRPr>
                     </a:p>
                   </a:txBody>
                   <a:tcPr marL="63500" marR="63500" marT="25400" marB="25400" anchor="ctr">
@@ -14014,6 +14378,11 @@
                     </a:lnB>
                   </a:tcPr>
                 </a:tc>
+                <a:extLst>
+                  <a:ext uri="{0D108BD9-81ED-4DB2-BD59-A6C34878D82A}">
+                    <a16:rowId xmlns:a16="http://schemas.microsoft.com/office/drawing/2014/main" val="10003"/>
+                  </a:ext>
+                </a:extLst>
               </a:tr>
               <a:tr h="588650">
                 <a:tc>
@@ -14042,15 +14411,6 @@
                         </a:rPr>
                         <a:t>Трудозатраты</a:t>
                       </a:r>
-                      <a:endParaRPr lang="en-US" sz="1200" b="1" i="0" u="none" strike="noStrike" cap="none">
-                        <a:solidFill>
-                          <a:srgbClr val="000000"/>
-                        </a:solidFill>
-                        <a:latin typeface="Times New Roman" panose="02020603050405020304" charset="0"/>
-                        <a:ea typeface="Lato" panose="020F0502020204030203"/>
-                        <a:cs typeface="Times New Roman" panose="02020603050405020304" charset="0"/>
-                        <a:sym typeface="Lato" panose="020F0502020204030203"/>
-                      </a:endParaRPr>
                     </a:p>
                   </a:txBody>
                   <a:tcPr marL="63500" marR="63500" marT="25400" marB="25400" anchor="ctr">
@@ -14126,15 +14486,6 @@
                         </a:rPr>
                         <a:t>Журнал производственных операций и работ по каждому виду продукции.</a:t>
                       </a:r>
-                      <a:endParaRPr lang="en-US" sz="1200" b="0" i="0" u="none" strike="noStrike" cap="none">
-                        <a:solidFill>
-                          <a:srgbClr val="000000"/>
-                        </a:solidFill>
-                        <a:latin typeface="Times New Roman" panose="02020603050405020304" charset="0"/>
-                        <a:ea typeface="Lato" panose="020F0502020204030203"/>
-                        <a:cs typeface="Times New Roman" panose="02020603050405020304" charset="0"/>
-                        <a:sym typeface="Lato" panose="020F0502020204030203"/>
-                      </a:endParaRPr>
                     </a:p>
                   </a:txBody>
                   <a:tcPr marL="63500" marR="63500" marT="25400" marB="25400" anchor="ctr">
@@ -14184,6 +14535,11 @@
                     </a:lnB>
                   </a:tcPr>
                 </a:tc>
+                <a:extLst>
+                  <a:ext uri="{0D108BD9-81ED-4DB2-BD59-A6C34878D82A}">
+                    <a16:rowId xmlns:a16="http://schemas.microsoft.com/office/drawing/2014/main" val="10004"/>
+                  </a:ext>
+                </a:extLst>
               </a:tr>
             </a:tbl>
           </a:graphicData>
@@ -14619,15 +14975,6 @@
               </a:rPr>
               <a:t>Структура базы данных</a:t>
             </a:r>
-            <a:endParaRPr lang="en-US" sz="3150" b="0" i="0" u="none" strike="noStrike" cap="none">
-              <a:solidFill>
-                <a:srgbClr val="1E293B"/>
-              </a:solidFill>
-              <a:latin typeface="Times New Roman" panose="02020603050405020304" charset="0"/>
-              <a:ea typeface="Poppins SemiBold" panose="00000500000000000000"/>
-              <a:cs typeface="Times New Roman" panose="02020603050405020304" charset="0"/>
-              <a:sym typeface="Poppins SemiBold" panose="00000500000000000000"/>
-            </a:endParaRPr>
           </a:p>
         </p:txBody>
       </p:sp>
@@ -14700,7 +15047,7 @@
     </p:bg>
     <p:spTree>
       <p:nvGrpSpPr>
-        <p:cNvPr id="164" name="Shape 164"/>
+        <p:cNvPr id="1" name="Shape 164"/>
         <p:cNvGrpSpPr/>
         <p:nvPr/>
       </p:nvGrpSpPr>
@@ -14719,7 +15066,7 @@
           <p:nvPr/>
         </p:nvPicPr>
         <p:blipFill rotWithShape="1">
-          <a:blip r:embed="rId1"/>
+          <a:blip r:embed="rId3"/>
           <a:srcRect/>
           <a:stretch>
             <a:fillRect/>
@@ -14785,15 +15132,6 @@
               </a:rPr>
               <a:t>Спасибо за внимание!</a:t>
             </a:r>
-            <a:endParaRPr lang="en-US" sz="5400" b="1" i="0" u="none" strike="noStrike" cap="none">
-              <a:solidFill>
-                <a:srgbClr val="1E293B"/>
-              </a:solidFill>
-              <a:latin typeface="Times New Roman" panose="02020603050405020304" charset="0"/>
-              <a:ea typeface="Lato" panose="020F0502020204030203"/>
-              <a:cs typeface="Times New Roman" panose="02020603050405020304" charset="0"/>
-              <a:sym typeface="Lato" panose="020F0502020204030203"/>
-            </a:endParaRPr>
           </a:p>
         </p:txBody>
       </p:sp>
@@ -15081,6 +15419,8 @@
       </a:bgFillStyleLst>
     </a:fmtScheme>
   </a:themeElements>
+  <a:objectDefaults/>
+  <a:extraClrSchemeLst/>
   <a:extLst>
     <a:ext uri="{05A4C25C-085E-4340-85A3-A5531E510DB2}">
       <thm15:themeFamily xmlns:thm15="http://schemas.microsoft.com/office/thememl/2012/main" name="Office Theme" id="{62F939B6-93AF-4DB8-9C6B-D6C7DFDC589F}" vid="{4A3C46E8-61CC-4603-A589-7422A47A8E4A}"/>
@@ -15365,6 +15705,8 @@
       </a:bgFillStyleLst>
     </a:fmtScheme>
   </a:themeElements>
+  <a:objectDefaults/>
+  <a:extraClrSchemeLst/>
   <a:extLst>
     <a:ext uri="{05A4C25C-085E-4340-85A3-A5531E510DB2}">
       <thm15:themeFamily xmlns:thm15="http://schemas.microsoft.com/office/thememl/2012/main" name="Office Theme" id="{62F939B6-93AF-4DB8-9C6B-D6C7DFDC589F}" vid="{4A3C46E8-61CC-4603-A589-7422A47A8E4A}"/>
